--- a/lecons/F4/54_F4_M2_L42_The_Management_of_Fish_Resources_in_Cameroon.pptx
+++ b/lecons/F4/54_F4_M2_L42_The_Management_of_Fish_Resources_in_Cameroon.pptx
@@ -13078,7 +13078,7 @@
         <p:spPr>
           <a:xfrm>
             <a:off x="0" y="658368"/>
-            <a:ext cx="3840480" cy="5833872"/>
+            <a:ext cx="5120640" cy="5833872"/>
           </a:xfrm>
           <a:prstGeom prst="rect">
             <a:avLst/>
@@ -13093,8 +13093,8 @@
         </p:nvSpPr>
         <p:spPr>
           <a:xfrm>
-            <a:off x="4069080" y="1005840"/>
-            <a:ext cx="7802575" cy="731520"/>
+            <a:off x="5349240" y="1005840"/>
+            <a:ext cx="6522415" cy="731520"/>
           </a:xfrm>
           <a:prstGeom prst="rect">
             <a:avLst/>
@@ -13134,8 +13134,8 @@
         </p:nvSpPr>
         <p:spPr>
           <a:xfrm>
-            <a:off x="4069080" y="1783080"/>
-            <a:ext cx="7802575" cy="4663440"/>
+            <a:off x="5349240" y="1783080"/>
+            <a:ext cx="6522415" cy="4663440"/>
           </a:xfrm>
           <a:prstGeom prst="rect">
             <a:avLst/>
@@ -13154,7 +13154,7 @@
               <a:buNone/>
             </a:pPr>
             <a:r>
-              <a:rPr lang="en-US" sz="4000" b="1" dirty="0">
+              <a:rPr lang="en-US" sz="3200" b="1" dirty="0">
                 <a:solidFill>
                   <a:srgbClr val="111111"/>
                 </a:solidFill>
@@ -13164,7 +13164,7 @@
               </a:rPr>
               <a:t>Topic: Management of Primary Resources</a:t>
             </a:r>
-            <a:endParaRPr lang="en-US" sz="4000" dirty="0"/>
+            <a:endParaRPr lang="en-US" sz="3200" dirty="0"/>
           </a:p>
           <a:p>
             <a:pPr algn="l" indent="0" marL="0">
@@ -13174,7 +13174,7 @@
               <a:buNone/>
             </a:pPr>
             <a:r>
-              <a:rPr lang="en-US" sz="4000" b="1" dirty="0">
+              <a:rPr lang="en-US" sz="3200" b="1" dirty="0">
                 <a:solidFill>
                   <a:srgbClr val="111111"/>
                 </a:solidFill>
@@ -13184,7 +13184,7 @@
               </a:rPr>
               <a:t>Sub-topic: The Economic Development Potentials of Cameroon in the Primary Sector: Fishing</a:t>
             </a:r>
-            <a:endParaRPr lang="en-US" sz="4000" dirty="0"/>
+            <a:endParaRPr lang="en-US" sz="3200" dirty="0"/>
           </a:p>
           <a:p>
             <a:pPr algn="l" indent="0" marL="0">
@@ -13194,7 +13194,7 @@
               <a:buNone/>
             </a:pPr>
             <a:r>
-              <a:rPr lang="en-US" sz="4000" b="1" dirty="0">
+              <a:rPr lang="en-US" sz="3200" b="1" dirty="0">
                 <a:solidFill>
                   <a:srgbClr val="990011"/>
                 </a:solidFill>
@@ -13204,7 +13204,7 @@
               </a:rPr>
               <a:t>Lesson 42: The Management of Fish Resources in Cameroon</a:t>
             </a:r>
-            <a:endParaRPr lang="en-US" sz="4000" dirty="0"/>
+            <a:endParaRPr lang="en-US" sz="3200" dirty="0"/>
           </a:p>
         </p:txBody>
       </p:sp>

--- a/lecons/F4/54_F4_M2_L42_The_Management_of_Fish_Resources_in_Cameroon.pptx
+++ b/lecons/F4/54_F4_M2_L42_The_Management_of_Fish_Resources_in_Cameroon.pptx
@@ -55,9 +55,12 @@
     <p:sldId id="303" r:id="rId49"/>
     <p:sldId id="304" r:id="rId50"/>
     <p:sldId id="305" r:id="rId51"/>
+    <p:sldId id="306" r:id="rId52"/>
+    <p:sldId id="307" r:id="rId53"/>
+    <p:sldId id="308" r:id="rId54"/>
   </p:sldIdLst>
   <p:notesMasterIdLst>
-    <p:notesMasterId r:id="rId52"/>
+    <p:notesMasterId r:id="rId55"/>
   </p:notesMasterIdLst>
   <p:sldSz cx="12192000" cy="6858000"/>
   <p:notesSz cx="6858000" cy="12192000"/>
@@ -3191,7 +3194,7 @@
           <a:p>
             <a:r>
               <a:rPr lang="en-US" dirty="0"/>
-              <a:t>Let us copy Importance and Problems. Fishing is important but faces problems. On this slide we have Importance and Problems. Write each point on a new line, with the key term first, and explain it in your own words when we revise.</a:t>
+              <a:t>Let us copy Importance. Fishing in Cameroon is important for the following reasons. On this slide we have Protein and Jobs. Write each point on a new line, with the key term first, and explain it in your own words when we revise. When you finish, we go to the next slide.</a:t>
             </a:r>
             <a:endParaRPr lang="en-US" dirty="0"/>
           </a:p>
@@ -3279,7 +3282,7 @@
           <a:p>
             <a:r>
               <a:rPr lang="en-US" dirty="0"/>
-              <a:t>Let us copy Recent Efforts to Conserve the Resource. The following efforts protect fish. On this slide we have Regulation and Fish farming. Write each point on a new line, with the key term first, and explain it in your own words when we revise.</a:t>
+              <a:t>We continue with Importance. On this slide we have Income. Write each point on a new line, with the key term first, and explain it in your own words when we revise.</a:t>
             </a:r>
             <a:endParaRPr lang="en-US" dirty="0"/>
           </a:p>
@@ -3367,7 +3370,7 @@
           <a:p>
             <a:r>
               <a:rPr lang="en-US" dirty="0"/>
-              <a:t>Now let us check what you have understood. Question 1: Distinguish artisanal and industrial fishing. Answer in your exercise book.</a:t>
+              <a:t>Let us copy Problems. Fishing in Cameroon faces the following problems. On this slide we have Poor equipment and Poor preservation. Write each point on a new line, with the key term first, and explain it in your own words when we revise. When you finish, we go to the next slide.</a:t>
             </a:r>
             <a:endParaRPr lang="en-US" dirty="0"/>
           </a:p>
@@ -3543,7 +3546,7 @@
           <a:p>
             <a:r>
               <a:rPr lang="en-US" dirty="0"/>
-              <a:t>The expected answer is: artisanal: canoes and nets. Industrial: trawlers at sea. If you got it right, well done.</a:t>
+              <a:t>We continue with Problems. On this slide we have Overfishing and illegal methods and Pollution. Write each point on a new line, with the key term first, and explain it in your own words when we revise.</a:t>
             </a:r>
             <a:endParaRPr lang="en-US" dirty="0"/>
           </a:p>
@@ -3631,7 +3634,7 @@
           <a:p>
             <a:r>
               <a:rPr lang="en-US" dirty="0"/>
-              <a:t>Now let us check what you have understood. Question 2: Give two efforts to conserve fish. Answer in your exercise book.</a:t>
+              <a:t>Let us copy Recent Efforts to Conserve the Resource. The following efforts protect fish. On this slide we have Regulation and Fish farming. Write each point on a new line, with the key term first, and explain it in your own words when we revise.</a:t>
             </a:r>
             <a:endParaRPr lang="en-US" dirty="0"/>
           </a:p>
@@ -3719,7 +3722,7 @@
           <a:p>
             <a:r>
               <a:rPr lang="en-US" dirty="0"/>
-              <a:t>The expected answer is: fishing licences and fish farming. If you got it right, well done.</a:t>
+              <a:t>Now let us check what you have understood. Question 1: Distinguish artisanal and industrial fishing. Answer in your exercise book.</a:t>
             </a:r>
             <a:endParaRPr lang="en-US" dirty="0"/>
           </a:p>
@@ -3807,7 +3810,7 @@
           <a:p>
             <a:r>
               <a:rPr lang="en-US" dirty="0"/>
-              <a:t>For those who need more practice, fill in the blanks in your exercise book. The answers are: number 1, artisanal; number 2, trawler; number 3, dried (or smoked).</a:t>
+              <a:t>The expected answer is: artisanal: canoes and nets. Industrial: trawlers at sea. If you got it right, well done.</a:t>
             </a:r>
             <a:endParaRPr lang="en-US" dirty="0"/>
           </a:p>
@@ -3895,7 +3898,7 @@
           <a:p>
             <a:r>
               <a:rPr lang="en-US" dirty="0"/>
-              <a:t>For your homework: Visit a fish market and write the types of fish sold and where they come from. We shall correct it at the beginning of our next lesson.</a:t>
+              <a:t>Now let us check what you have understood. Question 2: Give two efforts to conserve fish. Answer in your exercise book.</a:t>
             </a:r>
             <a:endParaRPr lang="en-US" dirty="0"/>
           </a:p>
@@ -3983,7 +3986,7 @@
           <a:p>
             <a:r>
               <a:rPr lang="en-US" dirty="0"/>
-              <a:t>Our next lesson will be on Lesson 43: Mineral Resources and their Management. Thank you for your attention, and see you next time.</a:t>
+              <a:t>The expected answer is: fishing licences and fish farming. If you got it right, well done.</a:t>
             </a:r>
             <a:endParaRPr lang="en-US" dirty="0"/>
           </a:p>
@@ -4071,7 +4074,7 @@
           <a:p>
             <a:r>
               <a:rPr lang="en-US" dirty="0"/>
-              <a:t>Let us play the bilingual game. I say a word in English, and you give me the French word. Then we do the reverse.</a:t>
+              <a:t>For those who need more practice, fill in the blanks in your exercise book. The answers are: number 1, artisanal; number 2, trawler; number 3, dried (or smoked).</a:t>
             </a:r>
             <a:endParaRPr lang="en-US" dirty="0"/>
           </a:p>
@@ -4159,7 +4162,7 @@
           <a:p>
             <a:r>
               <a:rPr lang="en-US" dirty="0"/>
-              <a:t>I record this information in the official logbook of the class after the lesson.</a:t>
+              <a:t>For your homework: Visit a fish market and write the types of fish sold and where they come from. We shall correct it at the beginning of our next lesson.</a:t>
             </a:r>
             <a:endParaRPr lang="en-US" dirty="0"/>
           </a:p>
@@ -4247,7 +4250,7 @@
           <a:p>
             <a:r>
               <a:rPr lang="en-US" dirty="0"/>
-              <a:t>I complete the second page of the logbook: the matter taught, the evaluation, the homework and the attendance.</a:t>
+              <a:t>Our next lesson will be on Lesson 43: Mineral Resources and their Management. Thank you for your attention, and see you next time.</a:t>
             </a:r>
             <a:endParaRPr lang="en-US" dirty="0"/>
           </a:p>
@@ -4335,7 +4338,7 @@
           <a:p>
             <a:r>
               <a:rPr lang="en-US" dirty="0"/>
-              <a:t>This slide is for me, the teacher: it gives the timing of the lesson and what to do if the projector is not available.</a:t>
+              <a:t>Let us play the bilingual game. I say a word in English, and you give me the French word. Then we do the reverse.</a:t>
             </a:r>
             <a:endParaRPr lang="en-US" dirty="0"/>
           </a:p>
@@ -4511,7 +4514,7 @@
           <a:p>
             <a:r>
               <a:rPr lang="en-US" dirty="0"/>
-              <a:t>These are the references and picture credits used to prepare this lesson.</a:t>
+              <a:t>I record this information in the official logbook of the class after the lesson.</a:t>
             </a:r>
             <a:endParaRPr lang="en-US" dirty="0"/>
           </a:p>
@@ -4535,6 +4538,270 @@
             <a:fld id="{F7021451-1387-4CA6-816F-3879F97B5CBC}" type="slidenum">
               <a:rPr lang="en-US"/>
               <a:t>50</a:t>
+            </a:fld>
+            <a:endParaRPr lang="en-US"/>
+          </a:p>
+        </p:txBody>
+      </p:sp>
+    </p:spTree>
+    <p:extLst>
+      <p:ext uri="{BB962C8B-B14F-4D97-AF65-F5344CB8AC3E}">
+        <p14:creationId xmlns:p14="http://schemas.microsoft.com/office/powerpoint/2010/main" val="1024086991"/>
+      </p:ext>
+    </p:extLst>
+  </p:cSld>
+  <p:clrMapOvr>
+    <a:masterClrMapping/>
+  </p:clrMapOvr>
+</p:notes>
+</file>
+
+<file path=ppt/notesSlides/notesSlide51.xml><?xml version="1.0" encoding="utf-8"?>
+<p:notes xmlns:a="http://schemas.openxmlformats.org/drawingml/2006/main" xmlns:r="http://schemas.openxmlformats.org/officeDocument/2006/relationships" xmlns:p="http://schemas.openxmlformats.org/presentationml/2006/main">
+  <p:cSld>
+    <p:spTree>
+      <p:nvGrpSpPr>
+        <p:cNvPr id="1" name=""/>
+        <p:cNvGrpSpPr/>
+        <p:nvPr/>
+      </p:nvGrpSpPr>
+      <p:grpSpPr>
+        <a:xfrm>
+          <a:off x="0" y="0"/>
+          <a:ext cx="0" cy="0"/>
+          <a:chOff x="0" y="0"/>
+          <a:chExt cx="0" cy="0"/>
+        </a:xfrm>
+      </p:grpSpPr>
+      <p:sp>
+        <p:nvSpPr>
+          <p:cNvPr id="2" name="Slide Image Placeholder 1"/>
+          <p:cNvSpPr>
+            <a:spLocks noGrp="1" noRot="1" noChangeAspect="1"/>
+          </p:cNvSpPr>
+          <p:nvPr>
+            <p:ph type="sldImg"/>
+          </p:nvPr>
+        </p:nvSpPr>
+        <p:spPr/>
+      </p:sp>
+      <p:sp>
+        <p:nvSpPr>
+          <p:cNvPr id="3" name="Notes Placeholder 2"/>
+          <p:cNvSpPr>
+            <a:spLocks noGrp="1"/>
+          </p:cNvSpPr>
+          <p:nvPr>
+            <p:ph type="body" idx="1"/>
+          </p:nvPr>
+        </p:nvSpPr>
+        <p:spPr/>
+        <p:txBody>
+          <a:bodyPr/>
+          <a:lstStyle/>
+          <a:p>
+            <a:r>
+              <a:rPr lang="en-US" dirty="0"/>
+              <a:t>I complete the second page of the logbook: the matter taught, the evaluation, the homework and the attendance.</a:t>
+            </a:r>
+            <a:endParaRPr lang="en-US" dirty="0"/>
+          </a:p>
+        </p:txBody>
+      </p:sp>
+      <p:sp>
+        <p:nvSpPr>
+          <p:cNvPr id="4" name="Slide Number Placeholder 3"/>
+          <p:cNvSpPr>
+            <a:spLocks noGrp="1"/>
+          </p:cNvSpPr>
+          <p:nvPr>
+            <p:ph type="sldNum" sz="quarter" idx="10"/>
+          </p:nvPr>
+        </p:nvSpPr>
+        <p:spPr/>
+        <p:txBody>
+          <a:bodyPr/>
+          <a:lstStyle/>
+          <a:p>
+            <a:fld id="{F7021451-1387-4CA6-816F-3879F97B5CBC}" type="slidenum">
+              <a:rPr lang="en-US"/>
+              <a:t>51</a:t>
+            </a:fld>
+            <a:endParaRPr lang="en-US"/>
+          </a:p>
+        </p:txBody>
+      </p:sp>
+    </p:spTree>
+    <p:extLst>
+      <p:ext uri="{BB962C8B-B14F-4D97-AF65-F5344CB8AC3E}">
+        <p14:creationId xmlns:p14="http://schemas.microsoft.com/office/powerpoint/2010/main" val="1024086991"/>
+      </p:ext>
+    </p:extLst>
+  </p:cSld>
+  <p:clrMapOvr>
+    <a:masterClrMapping/>
+  </p:clrMapOvr>
+</p:notes>
+</file>
+
+<file path=ppt/notesSlides/notesSlide52.xml><?xml version="1.0" encoding="utf-8"?>
+<p:notes xmlns:a="http://schemas.openxmlformats.org/drawingml/2006/main" xmlns:r="http://schemas.openxmlformats.org/officeDocument/2006/relationships" xmlns:p="http://schemas.openxmlformats.org/presentationml/2006/main">
+  <p:cSld>
+    <p:spTree>
+      <p:nvGrpSpPr>
+        <p:cNvPr id="1" name=""/>
+        <p:cNvGrpSpPr/>
+        <p:nvPr/>
+      </p:nvGrpSpPr>
+      <p:grpSpPr>
+        <a:xfrm>
+          <a:off x="0" y="0"/>
+          <a:ext cx="0" cy="0"/>
+          <a:chOff x="0" y="0"/>
+          <a:chExt cx="0" cy="0"/>
+        </a:xfrm>
+      </p:grpSpPr>
+      <p:sp>
+        <p:nvSpPr>
+          <p:cNvPr id="2" name="Slide Image Placeholder 1"/>
+          <p:cNvSpPr>
+            <a:spLocks noGrp="1" noRot="1" noChangeAspect="1"/>
+          </p:cNvSpPr>
+          <p:nvPr>
+            <p:ph type="sldImg"/>
+          </p:nvPr>
+        </p:nvSpPr>
+        <p:spPr/>
+      </p:sp>
+      <p:sp>
+        <p:nvSpPr>
+          <p:cNvPr id="3" name="Notes Placeholder 2"/>
+          <p:cNvSpPr>
+            <a:spLocks noGrp="1"/>
+          </p:cNvSpPr>
+          <p:nvPr>
+            <p:ph type="body" idx="1"/>
+          </p:nvPr>
+        </p:nvSpPr>
+        <p:spPr/>
+        <p:txBody>
+          <a:bodyPr/>
+          <a:lstStyle/>
+          <a:p>
+            <a:r>
+              <a:rPr lang="en-US" dirty="0"/>
+              <a:t>This slide is for me, the teacher: it gives the timing of the lesson and what to do if the projector is not available.</a:t>
+            </a:r>
+            <a:endParaRPr lang="en-US" dirty="0"/>
+          </a:p>
+        </p:txBody>
+      </p:sp>
+      <p:sp>
+        <p:nvSpPr>
+          <p:cNvPr id="4" name="Slide Number Placeholder 3"/>
+          <p:cNvSpPr>
+            <a:spLocks noGrp="1"/>
+          </p:cNvSpPr>
+          <p:nvPr>
+            <p:ph type="sldNum" sz="quarter" idx="10"/>
+          </p:nvPr>
+        </p:nvSpPr>
+        <p:spPr/>
+        <p:txBody>
+          <a:bodyPr/>
+          <a:lstStyle/>
+          <a:p>
+            <a:fld id="{F7021451-1387-4CA6-816F-3879F97B5CBC}" type="slidenum">
+              <a:rPr lang="en-US"/>
+              <a:t>52</a:t>
+            </a:fld>
+            <a:endParaRPr lang="en-US"/>
+          </a:p>
+        </p:txBody>
+      </p:sp>
+    </p:spTree>
+    <p:extLst>
+      <p:ext uri="{BB962C8B-B14F-4D97-AF65-F5344CB8AC3E}">
+        <p14:creationId xmlns:p14="http://schemas.microsoft.com/office/powerpoint/2010/main" val="1024086991"/>
+      </p:ext>
+    </p:extLst>
+  </p:cSld>
+  <p:clrMapOvr>
+    <a:masterClrMapping/>
+  </p:clrMapOvr>
+</p:notes>
+</file>
+
+<file path=ppt/notesSlides/notesSlide53.xml><?xml version="1.0" encoding="utf-8"?>
+<p:notes xmlns:a="http://schemas.openxmlformats.org/drawingml/2006/main" xmlns:r="http://schemas.openxmlformats.org/officeDocument/2006/relationships" xmlns:p="http://schemas.openxmlformats.org/presentationml/2006/main">
+  <p:cSld>
+    <p:spTree>
+      <p:nvGrpSpPr>
+        <p:cNvPr id="1" name=""/>
+        <p:cNvGrpSpPr/>
+        <p:nvPr/>
+      </p:nvGrpSpPr>
+      <p:grpSpPr>
+        <a:xfrm>
+          <a:off x="0" y="0"/>
+          <a:ext cx="0" cy="0"/>
+          <a:chOff x="0" y="0"/>
+          <a:chExt cx="0" cy="0"/>
+        </a:xfrm>
+      </p:grpSpPr>
+      <p:sp>
+        <p:nvSpPr>
+          <p:cNvPr id="2" name="Slide Image Placeholder 1"/>
+          <p:cNvSpPr>
+            <a:spLocks noGrp="1" noRot="1" noChangeAspect="1"/>
+          </p:cNvSpPr>
+          <p:nvPr>
+            <p:ph type="sldImg"/>
+          </p:nvPr>
+        </p:nvSpPr>
+        <p:spPr/>
+      </p:sp>
+      <p:sp>
+        <p:nvSpPr>
+          <p:cNvPr id="3" name="Notes Placeholder 2"/>
+          <p:cNvSpPr>
+            <a:spLocks noGrp="1"/>
+          </p:cNvSpPr>
+          <p:nvPr>
+            <p:ph type="body" idx="1"/>
+          </p:nvPr>
+        </p:nvSpPr>
+        <p:spPr/>
+        <p:txBody>
+          <a:bodyPr/>
+          <a:lstStyle/>
+          <a:p>
+            <a:r>
+              <a:rPr lang="en-US" dirty="0"/>
+              <a:t>These are the references and picture credits used to prepare this lesson.</a:t>
+            </a:r>
+            <a:endParaRPr lang="en-US" dirty="0"/>
+          </a:p>
+        </p:txBody>
+      </p:sp>
+      <p:sp>
+        <p:nvSpPr>
+          <p:cNvPr id="4" name="Slide Number Placeholder 3"/>
+          <p:cNvSpPr>
+            <a:spLocks noGrp="1"/>
+          </p:cNvSpPr>
+          <p:nvPr>
+            <p:ph type="sldNum" sz="quarter" idx="10"/>
+          </p:nvPr>
+        </p:nvSpPr>
+        <p:spPr/>
+        <p:txBody>
+          <a:bodyPr/>
+          <a:lstStyle/>
+          <a:p>
+            <a:fld id="{F7021451-1387-4CA6-816F-3879F97B5CBC}" type="slidenum">
+              <a:rPr lang="en-US"/>
+              <a:t>53</a:t>
             </a:fld>
             <a:endParaRPr lang="en-US"/>
           </a:p>
@@ -13922,8 +14189,47 @@
         </p:nvSpPr>
         <p:spPr>
           <a:xfrm>
-            <a:off x="4069080" y="1783080"/>
-            <a:ext cx="7802575" cy="4663440"/>
+            <a:off x="4069080" y="1737360"/>
+            <a:ext cx="7802575" cy="457200"/>
+          </a:xfrm>
+          <a:prstGeom prst="rect">
+            <a:avLst/>
+          </a:prstGeom>
+          <a:noFill/>
+          <a:ln/>
+        </p:spPr>
+        <p:txBody>
+          <a:bodyPr wrap="square" lIns="0" tIns="0" rIns="0" bIns="0" rtlCol="0" anchor="ctr"/>
+          <a:lstStyle/>
+          <a:p>
+            <a:pPr algn="l" indent="0" marL="0">
+              <a:buNone/>
+            </a:pPr>
+            <a:r>
+              <a:rPr lang="en-US" sz="3200" b="1" dirty="0">
+                <a:solidFill>
+                  <a:srgbClr val="990011"/>
+                </a:solidFill>
+                <a:latin typeface="Times New Roman" pitchFamily="34" charset="0"/>
+                <a:ea typeface="Times New Roman" pitchFamily="34" charset="-122"/>
+                <a:cs typeface="Times New Roman" pitchFamily="34" charset="-120"/>
+              </a:rPr>
+              <a:t>A) Importance</a:t>
+            </a:r>
+            <a:endParaRPr lang="en-US" sz="3200" dirty="0"/>
+          </a:p>
+        </p:txBody>
+      </p:sp>
+      <p:sp>
+        <p:nvSpPr>
+          <p:cNvPr id="6" name="Text 3"/>
+          <p:cNvSpPr/>
+          <p:nvPr/>
+        </p:nvSpPr>
+        <p:spPr>
+          <a:xfrm>
+            <a:off x="4069080" y="2240280"/>
+            <a:ext cx="7802575" cy="4206240"/>
           </a:xfrm>
           <a:prstGeom prst="rect">
             <a:avLst/>
@@ -13950,7 +14256,7 @@
                 <a:ea typeface="Times New Roman" pitchFamily="34" charset="-122"/>
                 <a:cs typeface="Times New Roman" pitchFamily="34" charset="-120"/>
               </a:rPr>
-              <a:t>Fishing is important but faces problems:</a:t>
+              <a:t>Fishing in Cameroon is important for the following reasons:</a:t>
             </a:r>
             <a:endParaRPr lang="en-US" sz="4000" dirty="0"/>
           </a:p>
@@ -13970,7 +14276,7 @@
                 <a:ea typeface="Times New Roman" pitchFamily="34" charset="-122"/>
                 <a:cs typeface="Times New Roman" pitchFamily="34" charset="-120"/>
               </a:rPr>
-              <a:t>Importance: </a:t>
+              <a:t>Protein: </a:t>
             </a:r>
             <a:pPr algn="l" indent="0" marL="0">
               <a:spcAft>
@@ -13987,7 +14293,7 @@
                 <a:ea typeface="Times New Roman" pitchFamily="34" charset="-122"/>
                 <a:cs typeface="Times New Roman" pitchFamily="34" charset="-120"/>
               </a:rPr>
-              <a:t>It provides protein, jobs and income.</a:t>
+              <a:t>Fish feeds the population.</a:t>
             </a:r>
             <a:endParaRPr lang="en-US" sz="4000" dirty="0"/>
           </a:p>
@@ -14007,7 +14313,7 @@
                 <a:ea typeface="Times New Roman" pitchFamily="34" charset="-122"/>
                 <a:cs typeface="Times New Roman" pitchFamily="34" charset="-120"/>
               </a:rPr>
-              <a:t>Problems: </a:t>
+              <a:t>Jobs: </a:t>
             </a:r>
             <a:pPr algn="l" indent="0" marL="0">
               <a:spcAft>
@@ -14024,7 +14330,7 @@
                 <a:ea typeface="Times New Roman" pitchFamily="34" charset="-122"/>
                 <a:cs typeface="Times New Roman" pitchFamily="34" charset="-120"/>
               </a:rPr>
-              <a:t>Poor equipment, poor preservation, overfishing, illegal methods and pollution.</a:t>
+              <a:t>Fishermen and fish sellers earn a living.</a:t>
             </a:r>
             <a:endParaRPr lang="en-US" sz="4000" dirty="0"/>
           </a:p>
@@ -14159,7 +14465,7 @@
         <p:spPr>
           <a:xfrm>
             <a:off x="0" y="658368"/>
-            <a:ext cx="3840480" cy="5833872"/>
+            <a:ext cx="5120640" cy="5833872"/>
           </a:xfrm>
           <a:prstGeom prst="rect">
             <a:avLst/>
@@ -14174,8 +14480,8 @@
         </p:nvSpPr>
         <p:spPr>
           <a:xfrm>
-            <a:off x="4069080" y="1005840"/>
-            <a:ext cx="7802575" cy="731520"/>
+            <a:off x="5349240" y="1005840"/>
+            <a:ext cx="6522415" cy="731520"/>
           </a:xfrm>
           <a:prstGeom prst="rect">
             <a:avLst/>
@@ -14201,7 +14507,7 @@
                 <a:ea typeface="Times New Roman" pitchFamily="34" charset="-122"/>
                 <a:cs typeface="Times New Roman" pitchFamily="34" charset="-120"/>
               </a:rPr>
-              <a:t>3. Recent Efforts to Conserve the Resource</a:t>
+              <a:t>2. Importance and Problems</a:t>
             </a:r>
             <a:endParaRPr lang="en-US" sz="3600" dirty="0"/>
           </a:p>
@@ -14215,8 +14521,47 @@
         </p:nvSpPr>
         <p:spPr>
           <a:xfrm>
-            <a:off x="4069080" y="1783080"/>
-            <a:ext cx="7802575" cy="4663440"/>
+            <a:off x="5349240" y="1737360"/>
+            <a:ext cx="6522415" cy="457200"/>
+          </a:xfrm>
+          <a:prstGeom prst="rect">
+            <a:avLst/>
+          </a:prstGeom>
+          <a:noFill/>
+          <a:ln/>
+        </p:spPr>
+        <p:txBody>
+          <a:bodyPr wrap="square" lIns="0" tIns="0" rIns="0" bIns="0" rtlCol="0" anchor="ctr"/>
+          <a:lstStyle/>
+          <a:p>
+            <a:pPr algn="l" indent="0" marL="0">
+              <a:buNone/>
+            </a:pPr>
+            <a:r>
+              <a:rPr lang="en-US" sz="3200" b="1" dirty="0">
+                <a:solidFill>
+                  <a:srgbClr val="990011"/>
+                </a:solidFill>
+                <a:latin typeface="Times New Roman" pitchFamily="34" charset="0"/>
+                <a:ea typeface="Times New Roman" pitchFamily="34" charset="-122"/>
+                <a:cs typeface="Times New Roman" pitchFamily="34" charset="-120"/>
+              </a:rPr>
+              <a:t>A) Importance (continued)</a:t>
+            </a:r>
+            <a:endParaRPr lang="en-US" sz="3200" dirty="0"/>
+          </a:p>
+        </p:txBody>
+      </p:sp>
+      <p:sp>
+        <p:nvSpPr>
+          <p:cNvPr id="6" name="Text 3"/>
+          <p:cNvSpPr/>
+          <p:nvPr/>
+        </p:nvSpPr>
+        <p:spPr>
+          <a:xfrm>
+            <a:off x="5349240" y="2240280"/>
+            <a:ext cx="6522415" cy="4206240"/>
           </a:xfrm>
           <a:prstGeom prst="rect">
             <a:avLst/>
@@ -14235,7 +14580,7 @@
               <a:buNone/>
             </a:pPr>
             <a:r>
-              <a:rPr lang="en-US" sz="4000" i="1" dirty="0">
+              <a:rPr lang="en-US" sz="4000" b="1" dirty="0">
                 <a:solidFill>
                   <a:srgbClr val="111111"/>
                 </a:solidFill>
@@ -14243,11 +14588,8 @@
                 <a:ea typeface="Times New Roman" pitchFamily="34" charset="-122"/>
                 <a:cs typeface="Times New Roman" pitchFamily="34" charset="-120"/>
               </a:rPr>
-              <a:t>The following efforts protect fish:</a:t>
-            </a:r>
-            <a:endParaRPr lang="en-US" sz="4000" dirty="0"/>
-          </a:p>
-          <a:p>
+              <a:t>Income: </a:t>
+            </a:r>
             <a:pPr algn="l" indent="0" marL="0">
               <a:spcAft>
                 <a:spcPts val="800"/>
@@ -14255,7 +14597,7 @@
               <a:buNone/>
             </a:pPr>
             <a:r>
-              <a:rPr lang="en-US" sz="4000" b="1" dirty="0">
+              <a:rPr lang="en-US" sz="4000" dirty="0">
                 <a:solidFill>
                   <a:srgbClr val="111111"/>
                 </a:solidFill>
@@ -14263,61 +14605,7 @@
                 <a:ea typeface="Times New Roman" pitchFamily="34" charset="-122"/>
                 <a:cs typeface="Times New Roman" pitchFamily="34" charset="-120"/>
               </a:rPr>
-              <a:t>Regulation: </a:t>
-            </a:r>
-            <a:pPr algn="l" indent="0" marL="0">
-              <a:spcAft>
-                <a:spcPts val="800"/>
-              </a:spcAft>
-              <a:buNone/>
-            </a:pPr>
-            <a:r>
-              <a:rPr lang="en-US" sz="4000" dirty="0">
-                <a:solidFill>
-                  <a:srgbClr val="111111"/>
-                </a:solidFill>
-                <a:latin typeface="Times New Roman" pitchFamily="34" charset="0"/>
-                <a:ea typeface="Times New Roman" pitchFamily="34" charset="-122"/>
-                <a:cs typeface="Times New Roman" pitchFamily="34" charset="-120"/>
-              </a:rPr>
-              <a:t>Fishing licences, closed seasons and control of net sizes are enforced.</a:t>
-            </a:r>
-            <a:endParaRPr lang="en-US" sz="4000" dirty="0"/>
-          </a:p>
-          <a:p>
-            <a:pPr algn="l" indent="0" marL="0">
-              <a:spcAft>
-                <a:spcPts val="800"/>
-              </a:spcAft>
-              <a:buNone/>
-            </a:pPr>
-            <a:r>
-              <a:rPr lang="en-US" sz="4000" b="1" dirty="0">
-                <a:solidFill>
-                  <a:srgbClr val="111111"/>
-                </a:solidFill>
-                <a:latin typeface="Times New Roman" pitchFamily="34" charset="0"/>
-                <a:ea typeface="Times New Roman" pitchFamily="34" charset="-122"/>
-                <a:cs typeface="Times New Roman" pitchFamily="34" charset="-120"/>
-              </a:rPr>
-              <a:t>Fish farming: </a:t>
-            </a:r>
-            <a:pPr algn="l" indent="0" marL="0">
-              <a:spcAft>
-                <a:spcPts val="800"/>
-              </a:spcAft>
-              <a:buNone/>
-            </a:pPr>
-            <a:r>
-              <a:rPr lang="en-US" sz="4000" dirty="0">
-                <a:solidFill>
-                  <a:srgbClr val="111111"/>
-                </a:solidFill>
-                <a:latin typeface="Times New Roman" pitchFamily="34" charset="0"/>
-                <a:ea typeface="Times New Roman" pitchFamily="34" charset="-122"/>
-                <a:cs typeface="Times New Roman" pitchFamily="34" charset="-120"/>
-              </a:rPr>
-              <a:t>The state promotes pisciculture in ponds.</a:t>
+              <a:t>Fish is sold in towns and to neighbouring countries.</a:t>
             </a:r>
             <a:endParaRPr lang="en-US" sz="4000" dirty="0"/>
           </a:p>
@@ -14429,7 +14717,7 @@
                 <a:ea typeface="Calibri" pitchFamily="34" charset="-122"/>
                 <a:cs typeface="Calibri" pitchFamily="34" charset="-120"/>
               </a:rPr>
-              <a:t>FORMATIVE EVALUATION</a:t>
+              <a:t>BOARD SUMMARY</a:t>
             </a:r>
             <a:endParaRPr lang="en-US" sz="1400" dirty="0"/>
           </a:p>
@@ -14494,7 +14782,7 @@
                 <a:ea typeface="Times New Roman" pitchFamily="34" charset="-122"/>
                 <a:cs typeface="Times New Roman" pitchFamily="34" charset="-120"/>
               </a:rPr>
-              <a:t>Evaluation 1</a:t>
+              <a:t>2. Importance and Problems</a:t>
             </a:r>
             <a:endParaRPr lang="en-US" sz="3600" dirty="0"/>
           </a:p>
@@ -14508,8 +14796,47 @@
         </p:nvSpPr>
         <p:spPr>
           <a:xfrm>
-            <a:off x="5349240" y="1783080"/>
-            <a:ext cx="6522415" cy="4663440"/>
+            <a:off x="5349240" y="1737360"/>
+            <a:ext cx="6522415" cy="457200"/>
+          </a:xfrm>
+          <a:prstGeom prst="rect">
+            <a:avLst/>
+          </a:prstGeom>
+          <a:noFill/>
+          <a:ln/>
+        </p:spPr>
+        <p:txBody>
+          <a:bodyPr wrap="square" lIns="0" tIns="0" rIns="0" bIns="0" rtlCol="0" anchor="ctr"/>
+          <a:lstStyle/>
+          <a:p>
+            <a:pPr algn="l" indent="0" marL="0">
+              <a:buNone/>
+            </a:pPr>
+            <a:r>
+              <a:rPr lang="en-US" sz="3200" b="1" dirty="0">
+                <a:solidFill>
+                  <a:srgbClr val="990011"/>
+                </a:solidFill>
+                <a:latin typeface="Times New Roman" pitchFamily="34" charset="0"/>
+                <a:ea typeface="Times New Roman" pitchFamily="34" charset="-122"/>
+                <a:cs typeface="Times New Roman" pitchFamily="34" charset="-120"/>
+              </a:rPr>
+              <a:t>B) Problems</a:t>
+            </a:r>
+            <a:endParaRPr lang="en-US" sz="3200" dirty="0"/>
+          </a:p>
+        </p:txBody>
+      </p:sp>
+      <p:sp>
+        <p:nvSpPr>
+          <p:cNvPr id="6" name="Text 3"/>
+          <p:cNvSpPr/>
+          <p:nvPr/>
+        </p:nvSpPr>
+        <p:spPr>
+          <a:xfrm>
+            <a:off x="5349240" y="2240280"/>
+            <a:ext cx="6522415" cy="4206240"/>
           </a:xfrm>
           <a:prstGeom prst="rect">
             <a:avLst/>
@@ -14528,7 +14855,7 @@
               <a:buNone/>
             </a:pPr>
             <a:r>
-              <a:rPr lang="en-US" sz="4000" dirty="0">
+              <a:rPr lang="en-US" sz="4000" i="1" dirty="0">
                 <a:solidFill>
                   <a:srgbClr val="111111"/>
                 </a:solidFill>
@@ -14536,7 +14863,81 @@
                 <a:ea typeface="Times New Roman" pitchFamily="34" charset="-122"/>
                 <a:cs typeface="Times New Roman" pitchFamily="34" charset="-120"/>
               </a:rPr>
-              <a:t>Distinguish artisanal and industrial fishing.</a:t>
+              <a:t>Fishing in Cameroon faces the following problems:</a:t>
+            </a:r>
+            <a:endParaRPr lang="en-US" sz="4000" dirty="0"/>
+          </a:p>
+          <a:p>
+            <a:pPr algn="l" indent="0" marL="0">
+              <a:spcAft>
+                <a:spcPts val="800"/>
+              </a:spcAft>
+              <a:buNone/>
+            </a:pPr>
+            <a:r>
+              <a:rPr lang="en-US" sz="4000" b="1" dirty="0">
+                <a:solidFill>
+                  <a:srgbClr val="111111"/>
+                </a:solidFill>
+                <a:latin typeface="Times New Roman" pitchFamily="34" charset="0"/>
+                <a:ea typeface="Times New Roman" pitchFamily="34" charset="-122"/>
+                <a:cs typeface="Times New Roman" pitchFamily="34" charset="-120"/>
+              </a:rPr>
+              <a:t>Poor equipment: </a:t>
+            </a:r>
+            <a:pPr algn="l" indent="0" marL="0">
+              <a:spcAft>
+                <a:spcPts val="800"/>
+              </a:spcAft>
+              <a:buNone/>
+            </a:pPr>
+            <a:r>
+              <a:rPr lang="en-US" sz="4000" dirty="0">
+                <a:solidFill>
+                  <a:srgbClr val="111111"/>
+                </a:solidFill>
+                <a:latin typeface="Times New Roman" pitchFamily="34" charset="0"/>
+                <a:ea typeface="Times New Roman" pitchFamily="34" charset="-122"/>
+                <a:cs typeface="Times New Roman" pitchFamily="34" charset="-120"/>
+              </a:rPr>
+              <a:t>Many fishermen use small canoes.</a:t>
+            </a:r>
+            <a:endParaRPr lang="en-US" sz="4000" dirty="0"/>
+          </a:p>
+          <a:p>
+            <a:pPr algn="l" indent="0" marL="0">
+              <a:spcAft>
+                <a:spcPts val="800"/>
+              </a:spcAft>
+              <a:buNone/>
+            </a:pPr>
+            <a:r>
+              <a:rPr lang="en-US" sz="4000" b="1" dirty="0">
+                <a:solidFill>
+                  <a:srgbClr val="111111"/>
+                </a:solidFill>
+                <a:latin typeface="Times New Roman" pitchFamily="34" charset="0"/>
+                <a:ea typeface="Times New Roman" pitchFamily="34" charset="-122"/>
+                <a:cs typeface="Times New Roman" pitchFamily="34" charset="-120"/>
+              </a:rPr>
+              <a:t>Poor preservation: </a:t>
+            </a:r>
+            <a:pPr algn="l" indent="0" marL="0">
+              <a:spcAft>
+                <a:spcPts val="800"/>
+              </a:spcAft>
+              <a:buNone/>
+            </a:pPr>
+            <a:r>
+              <a:rPr lang="en-US" sz="4000" dirty="0">
+                <a:solidFill>
+                  <a:srgbClr val="111111"/>
+                </a:solidFill>
+                <a:latin typeface="Times New Roman" pitchFamily="34" charset="0"/>
+                <a:ea typeface="Times New Roman" pitchFamily="34" charset="-122"/>
+                <a:cs typeface="Times New Roman" pitchFamily="34" charset="-120"/>
+              </a:rPr>
+              <a:t>Fish rots without cold stores.</a:t>
             </a:r>
             <a:endParaRPr lang="en-US" sz="4000" dirty="0"/>
           </a:p>
@@ -14887,7 +15288,7 @@
                 <a:ea typeface="Calibri" pitchFamily="34" charset="-122"/>
                 <a:cs typeface="Calibri" pitchFamily="34" charset="-120"/>
               </a:rPr>
-              <a:t>FORMATIVE EVALUATION</a:t>
+              <a:t>BOARD SUMMARY</a:t>
             </a:r>
             <a:endParaRPr lang="en-US" sz="1400" dirty="0"/>
           </a:p>
@@ -14952,7 +15353,7 @@
                 <a:ea typeface="Times New Roman" pitchFamily="34" charset="-122"/>
                 <a:cs typeface="Times New Roman" pitchFamily="34" charset="-120"/>
               </a:rPr>
-              <a:t>Expected Answer</a:t>
+              <a:t>2. Importance and Problems</a:t>
             </a:r>
             <a:endParaRPr lang="en-US" sz="3600" dirty="0"/>
           </a:p>
@@ -14966,8 +15367,47 @@
         </p:nvSpPr>
         <p:spPr>
           <a:xfrm>
-            <a:off x="5349240" y="1783080"/>
-            <a:ext cx="6522415" cy="4663440"/>
+            <a:off x="5349240" y="1737360"/>
+            <a:ext cx="6522415" cy="457200"/>
+          </a:xfrm>
+          <a:prstGeom prst="rect">
+            <a:avLst/>
+          </a:prstGeom>
+          <a:noFill/>
+          <a:ln/>
+        </p:spPr>
+        <p:txBody>
+          <a:bodyPr wrap="square" lIns="0" tIns="0" rIns="0" bIns="0" rtlCol="0" anchor="ctr"/>
+          <a:lstStyle/>
+          <a:p>
+            <a:pPr algn="l" indent="0" marL="0">
+              <a:buNone/>
+            </a:pPr>
+            <a:r>
+              <a:rPr lang="en-US" sz="3200" b="1" dirty="0">
+                <a:solidFill>
+                  <a:srgbClr val="990011"/>
+                </a:solidFill>
+                <a:latin typeface="Times New Roman" pitchFamily="34" charset="0"/>
+                <a:ea typeface="Times New Roman" pitchFamily="34" charset="-122"/>
+                <a:cs typeface="Times New Roman" pitchFamily="34" charset="-120"/>
+              </a:rPr>
+              <a:t>B) Problems (continued)</a:t>
+            </a:r>
+            <a:endParaRPr lang="en-US" sz="3200" dirty="0"/>
+          </a:p>
+        </p:txBody>
+      </p:sp>
+      <p:sp>
+        <p:nvSpPr>
+          <p:cNvPr id="6" name="Text 3"/>
+          <p:cNvSpPr/>
+          <p:nvPr/>
+        </p:nvSpPr>
+        <p:spPr>
+          <a:xfrm>
+            <a:off x="5349240" y="2240280"/>
+            <a:ext cx="6522415" cy="4206240"/>
           </a:xfrm>
           <a:prstGeom prst="rect">
             <a:avLst/>
@@ -14986,7 +15426,7 @@
               <a:buNone/>
             </a:pPr>
             <a:r>
-              <a:rPr lang="en-US" sz="4000" dirty="0">
+              <a:rPr lang="en-US" sz="4000" b="1" dirty="0">
                 <a:solidFill>
                   <a:srgbClr val="111111"/>
                 </a:solidFill>
@@ -14994,7 +15434,61 @@
                 <a:ea typeface="Times New Roman" pitchFamily="34" charset="-122"/>
                 <a:cs typeface="Times New Roman" pitchFamily="34" charset="-120"/>
               </a:rPr>
-              <a:t>Artisanal: canoes and nets. Industrial: trawlers at sea.</a:t>
+              <a:t>Overfishing and illegal methods: </a:t>
+            </a:r>
+            <a:pPr algn="l" indent="0" marL="0">
+              <a:spcAft>
+                <a:spcPts val="800"/>
+              </a:spcAft>
+              <a:buNone/>
+            </a:pPr>
+            <a:r>
+              <a:rPr lang="en-US" sz="4000" dirty="0">
+                <a:solidFill>
+                  <a:srgbClr val="111111"/>
+                </a:solidFill>
+                <a:latin typeface="Times New Roman" pitchFamily="34" charset="0"/>
+                <a:ea typeface="Times New Roman" pitchFamily="34" charset="-122"/>
+                <a:cs typeface="Times New Roman" pitchFamily="34" charset="-120"/>
+              </a:rPr>
+              <a:t>Small nets and poisons kill young fish.</a:t>
+            </a:r>
+            <a:endParaRPr lang="en-US" sz="4000" dirty="0"/>
+          </a:p>
+          <a:p>
+            <a:pPr algn="l" indent="0" marL="0">
+              <a:spcAft>
+                <a:spcPts val="800"/>
+              </a:spcAft>
+              <a:buNone/>
+            </a:pPr>
+            <a:r>
+              <a:rPr lang="en-US" sz="4000" b="1" dirty="0">
+                <a:solidFill>
+                  <a:srgbClr val="111111"/>
+                </a:solidFill>
+                <a:latin typeface="Times New Roman" pitchFamily="34" charset="0"/>
+                <a:ea typeface="Times New Roman" pitchFamily="34" charset="-122"/>
+                <a:cs typeface="Times New Roman" pitchFamily="34" charset="-120"/>
+              </a:rPr>
+              <a:t>Pollution: </a:t>
+            </a:r>
+            <a:pPr algn="l" indent="0" marL="0">
+              <a:spcAft>
+                <a:spcPts val="800"/>
+              </a:spcAft>
+              <a:buNone/>
+            </a:pPr>
+            <a:r>
+              <a:rPr lang="en-US" sz="4000" dirty="0">
+                <a:solidFill>
+                  <a:srgbClr val="111111"/>
+                </a:solidFill>
+                <a:latin typeface="Times New Roman" pitchFamily="34" charset="0"/>
+                <a:ea typeface="Times New Roman" pitchFamily="34" charset="-122"/>
+                <a:cs typeface="Times New Roman" pitchFamily="34" charset="-120"/>
+              </a:rPr>
+              <a:t>Dirty water kills fish.</a:t>
             </a:r>
             <a:endParaRPr lang="en-US" sz="4000" dirty="0"/>
           </a:p>
@@ -15106,7 +15600,7 @@
                 <a:ea typeface="Calibri" pitchFamily="34" charset="-122"/>
                 <a:cs typeface="Calibri" pitchFamily="34" charset="-120"/>
               </a:rPr>
-              <a:t>FORMATIVE EVALUATION</a:t>
+              <a:t>BOARD SUMMARY</a:t>
             </a:r>
             <a:endParaRPr lang="en-US" sz="1400" dirty="0"/>
           </a:p>
@@ -15129,7 +15623,7 @@
         <p:spPr>
           <a:xfrm>
             <a:off x="0" y="658368"/>
-            <a:ext cx="5120640" cy="5833872"/>
+            <a:ext cx="3840480" cy="5833872"/>
           </a:xfrm>
           <a:prstGeom prst="rect">
             <a:avLst/>
@@ -15144,8 +15638,8 @@
         </p:nvSpPr>
         <p:spPr>
           <a:xfrm>
-            <a:off x="5349240" y="1005840"/>
-            <a:ext cx="6522415" cy="731520"/>
+            <a:off x="4069080" y="1005840"/>
+            <a:ext cx="7802575" cy="731520"/>
           </a:xfrm>
           <a:prstGeom prst="rect">
             <a:avLst/>
@@ -15171,7 +15665,7 @@
                 <a:ea typeface="Times New Roman" pitchFamily="34" charset="-122"/>
                 <a:cs typeface="Times New Roman" pitchFamily="34" charset="-120"/>
               </a:rPr>
-              <a:t>Evaluation 2</a:t>
+              <a:t>3. Recent Efforts to Conserve the Resource</a:t>
             </a:r>
             <a:endParaRPr lang="en-US" sz="3600" dirty="0"/>
           </a:p>
@@ -15185,8 +15679,8 @@
         </p:nvSpPr>
         <p:spPr>
           <a:xfrm>
-            <a:off x="5349240" y="1783080"/>
-            <a:ext cx="6522415" cy="4663440"/>
+            <a:off x="4069080" y="1783080"/>
+            <a:ext cx="7802575" cy="4663440"/>
           </a:xfrm>
           <a:prstGeom prst="rect">
             <a:avLst/>
@@ -15205,7 +15699,7 @@
               <a:buNone/>
             </a:pPr>
             <a:r>
-              <a:rPr lang="en-US" sz="4000" dirty="0">
+              <a:rPr lang="en-US" sz="4000" i="1" dirty="0">
                 <a:solidFill>
                   <a:srgbClr val="111111"/>
                 </a:solidFill>
@@ -15213,7 +15707,81 @@
                 <a:ea typeface="Times New Roman" pitchFamily="34" charset="-122"/>
                 <a:cs typeface="Times New Roman" pitchFamily="34" charset="-120"/>
               </a:rPr>
-              <a:t>Give two efforts to conserve fish.</a:t>
+              <a:t>The following efforts protect fish:</a:t>
+            </a:r>
+            <a:endParaRPr lang="en-US" sz="4000" dirty="0"/>
+          </a:p>
+          <a:p>
+            <a:pPr algn="l" indent="0" marL="0">
+              <a:spcAft>
+                <a:spcPts val="800"/>
+              </a:spcAft>
+              <a:buNone/>
+            </a:pPr>
+            <a:r>
+              <a:rPr lang="en-US" sz="4000" b="1" dirty="0">
+                <a:solidFill>
+                  <a:srgbClr val="111111"/>
+                </a:solidFill>
+                <a:latin typeface="Times New Roman" pitchFamily="34" charset="0"/>
+                <a:ea typeface="Times New Roman" pitchFamily="34" charset="-122"/>
+                <a:cs typeface="Times New Roman" pitchFamily="34" charset="-120"/>
+              </a:rPr>
+              <a:t>Regulation: </a:t>
+            </a:r>
+            <a:pPr algn="l" indent="0" marL="0">
+              <a:spcAft>
+                <a:spcPts val="800"/>
+              </a:spcAft>
+              <a:buNone/>
+            </a:pPr>
+            <a:r>
+              <a:rPr lang="en-US" sz="4000" dirty="0">
+                <a:solidFill>
+                  <a:srgbClr val="111111"/>
+                </a:solidFill>
+                <a:latin typeface="Times New Roman" pitchFamily="34" charset="0"/>
+                <a:ea typeface="Times New Roman" pitchFamily="34" charset="-122"/>
+                <a:cs typeface="Times New Roman" pitchFamily="34" charset="-120"/>
+              </a:rPr>
+              <a:t>Fishing licences, closed seasons and control of net sizes are enforced.</a:t>
+            </a:r>
+            <a:endParaRPr lang="en-US" sz="4000" dirty="0"/>
+          </a:p>
+          <a:p>
+            <a:pPr algn="l" indent="0" marL="0">
+              <a:spcAft>
+                <a:spcPts val="800"/>
+              </a:spcAft>
+              <a:buNone/>
+            </a:pPr>
+            <a:r>
+              <a:rPr lang="en-US" sz="4000" b="1" dirty="0">
+                <a:solidFill>
+                  <a:srgbClr val="111111"/>
+                </a:solidFill>
+                <a:latin typeface="Times New Roman" pitchFamily="34" charset="0"/>
+                <a:ea typeface="Times New Roman" pitchFamily="34" charset="-122"/>
+                <a:cs typeface="Times New Roman" pitchFamily="34" charset="-120"/>
+              </a:rPr>
+              <a:t>Fish farming: </a:t>
+            </a:r>
+            <a:pPr algn="l" indent="0" marL="0">
+              <a:spcAft>
+                <a:spcPts val="800"/>
+              </a:spcAft>
+              <a:buNone/>
+            </a:pPr>
+            <a:r>
+              <a:rPr lang="en-US" sz="4000" dirty="0">
+                <a:solidFill>
+                  <a:srgbClr val="111111"/>
+                </a:solidFill>
+                <a:latin typeface="Times New Roman" pitchFamily="34" charset="0"/>
+                <a:ea typeface="Times New Roman" pitchFamily="34" charset="-122"/>
+                <a:cs typeface="Times New Roman" pitchFamily="34" charset="-120"/>
+              </a:rPr>
+              <a:t>The state promotes pisciculture in ponds.</a:t>
             </a:r>
             <a:endParaRPr lang="en-US" sz="4000" dirty="0"/>
           </a:p>
@@ -15390,7 +15958,7 @@
                 <a:ea typeface="Times New Roman" pitchFamily="34" charset="-122"/>
                 <a:cs typeface="Times New Roman" pitchFamily="34" charset="-120"/>
               </a:rPr>
-              <a:t>Expected Answer</a:t>
+              <a:t>Evaluation 1</a:t>
             </a:r>
             <a:endParaRPr lang="en-US" sz="3600" dirty="0"/>
           </a:p>
@@ -15432,7 +16000,7 @@
                 <a:ea typeface="Times New Roman" pitchFamily="34" charset="-122"/>
                 <a:cs typeface="Times New Roman" pitchFamily="34" charset="-120"/>
               </a:rPr>
-              <a:t>Fishing licences and fish farming.</a:t>
+              <a:t>Distinguish artisanal and industrial fishing.</a:t>
             </a:r>
             <a:endParaRPr lang="en-US" sz="4000" dirty="0"/>
           </a:p>
@@ -15544,7 +16112,7 @@
                 <a:ea typeface="Calibri" pitchFamily="34" charset="-122"/>
                 <a:cs typeface="Calibri" pitchFamily="34" charset="-120"/>
               </a:rPr>
-              <a:t>REMEDIATION</a:t>
+              <a:t>FORMATIVE EVALUATION</a:t>
             </a:r>
             <a:endParaRPr lang="en-US" sz="1400" dirty="0"/>
           </a:p>
@@ -15567,7 +16135,7 @@
         <p:spPr>
           <a:xfrm>
             <a:off x="0" y="658368"/>
-            <a:ext cx="2468880" cy="5833872"/>
+            <a:ext cx="5120640" cy="5833872"/>
           </a:xfrm>
           <a:prstGeom prst="rect">
             <a:avLst/>
@@ -15582,8 +16150,8 @@
         </p:nvSpPr>
         <p:spPr>
           <a:xfrm>
-            <a:off x="2697480" y="1005840"/>
-            <a:ext cx="9174175" cy="731520"/>
+            <a:off x="5349240" y="1005840"/>
+            <a:ext cx="6522415" cy="731520"/>
           </a:xfrm>
           <a:prstGeom prst="rect">
             <a:avLst/>
@@ -15609,7 +16177,7 @@
                 <a:ea typeface="Times New Roman" pitchFamily="34" charset="-122"/>
                 <a:cs typeface="Times New Roman" pitchFamily="34" charset="-120"/>
               </a:rPr>
-              <a:t>Remediation</a:t>
+              <a:t>Expected Answer</a:t>
             </a:r>
             <a:endParaRPr lang="en-US" sz="3600" dirty="0"/>
           </a:p>
@@ -15623,8 +16191,8 @@
         </p:nvSpPr>
         <p:spPr>
           <a:xfrm>
-            <a:off x="2697480" y="1783080"/>
-            <a:ext cx="9174175" cy="4663440"/>
+            <a:off x="5349240" y="1783080"/>
+            <a:ext cx="6522415" cy="4663440"/>
           </a:xfrm>
           <a:prstGeom prst="rect">
             <a:avLst/>
@@ -15643,7 +16211,7 @@
               <a:buNone/>
             </a:pPr>
             <a:r>
-              <a:rPr lang="en-US" sz="4000" b="1" dirty="0">
+              <a:rPr lang="en-US" sz="4000" dirty="0">
                 <a:solidFill>
                   <a:srgbClr val="111111"/>
                 </a:solidFill>
@@ -15651,73 +16219,7 @@
                 <a:ea typeface="Times New Roman" pitchFamily="34" charset="-122"/>
                 <a:cs typeface="Times New Roman" pitchFamily="34" charset="-120"/>
               </a:rPr>
-              <a:t>Fill in the blanks:</a:t>
-            </a:r>
-            <a:endParaRPr lang="en-US" sz="4000" dirty="0"/>
-          </a:p>
-          <a:p>
-            <a:pPr algn="l" marL="342900" indent="-342900">
-              <a:spcAft>
-                <a:spcPts val="800"/>
-              </a:spcAft>
-              <a:buSzPct val="100000"/>
-              <a:buFont typeface="+mj-lt"/>
-              <a:buAutoNum type="arabicPeriod" startAt="1"/>
-            </a:pPr>
-            <a:r>
-              <a:rPr lang="en-US" sz="4000" dirty="0">
-                <a:solidFill>
-                  <a:srgbClr val="111111"/>
-                </a:solidFill>
-                <a:latin typeface="Times New Roman" pitchFamily="34" charset="0"/>
-                <a:ea typeface="Times New Roman" pitchFamily="34" charset="-122"/>
-                <a:cs typeface="Times New Roman" pitchFamily="34" charset="-120"/>
-              </a:rPr>
-              <a:t>Small-scale fishing is ______ fishing.</a:t>
-            </a:r>
-            <a:endParaRPr lang="en-US" sz="4000" dirty="0"/>
-          </a:p>
-          <a:p>
-            <a:pPr algn="l" marL="342900" indent="-342900">
-              <a:spcAft>
-                <a:spcPts val="800"/>
-              </a:spcAft>
-              <a:buSzPct val="100000"/>
-              <a:buFont typeface="+mj-lt"/>
-              <a:buAutoNum type="arabicPeriod" startAt="1"/>
-            </a:pPr>
-            <a:r>
-              <a:rPr lang="en-US" sz="4000" dirty="0">
-                <a:solidFill>
-                  <a:srgbClr val="111111"/>
-                </a:solidFill>
-                <a:latin typeface="Times New Roman" pitchFamily="34" charset="0"/>
-                <a:ea typeface="Times New Roman" pitchFamily="34" charset="-122"/>
-                <a:cs typeface="Times New Roman" pitchFamily="34" charset="-120"/>
-              </a:rPr>
-              <a:t>A large fishing boat is a ______.</a:t>
-            </a:r>
-            <a:endParaRPr lang="en-US" sz="4000" dirty="0"/>
-          </a:p>
-          <a:p>
-            <a:pPr algn="l" marL="342900" indent="-342900">
-              <a:spcAft>
-                <a:spcPts val="800"/>
-              </a:spcAft>
-              <a:buSzPct val="100000"/>
-              <a:buFont typeface="+mj-lt"/>
-              <a:buAutoNum type="arabicPeriod" startAt="1"/>
-            </a:pPr>
-            <a:r>
-              <a:rPr lang="en-US" sz="4000" dirty="0">
-                <a:solidFill>
-                  <a:srgbClr val="111111"/>
-                </a:solidFill>
-                <a:latin typeface="Times New Roman" pitchFamily="34" charset="0"/>
-                <a:ea typeface="Times New Roman" pitchFamily="34" charset="-122"/>
-                <a:cs typeface="Times New Roman" pitchFamily="34" charset="-120"/>
-              </a:rPr>
-              <a:t>Fish from Lagdo is often ______ to preserve it.</a:t>
+              <a:t>Artisanal: canoes and nets. Industrial: trawlers at sea.</a:t>
             </a:r>
             <a:endParaRPr lang="en-US" sz="4000" dirty="0"/>
           </a:p>
@@ -15829,7 +16331,7 @@
                 <a:ea typeface="Calibri" pitchFamily="34" charset="-122"/>
                 <a:cs typeface="Calibri" pitchFamily="34" charset="-120"/>
               </a:rPr>
-              <a:t>HOMEWORK</a:t>
+              <a:t>FORMATIVE EVALUATION</a:t>
             </a:r>
             <a:endParaRPr lang="en-US" sz="1400" dirty="0"/>
           </a:p>
@@ -15894,7 +16396,7 @@
                 <a:ea typeface="Times New Roman" pitchFamily="34" charset="-122"/>
                 <a:cs typeface="Times New Roman" pitchFamily="34" charset="-120"/>
               </a:rPr>
-              <a:t>Homework</a:t>
+              <a:t>Evaluation 2</a:t>
             </a:r>
             <a:endParaRPr lang="en-US" sz="3600" dirty="0"/>
           </a:p>
@@ -15936,7 +16438,7 @@
                 <a:ea typeface="Times New Roman" pitchFamily="34" charset="-122"/>
                 <a:cs typeface="Times New Roman" pitchFamily="34" charset="-120"/>
               </a:rPr>
-              <a:t>Visit a fish market and write the types of fish sold and where they come from.</a:t>
+              <a:t>Give two efforts to conserve fish.</a:t>
             </a:r>
             <a:endParaRPr lang="en-US" sz="4000" dirty="0"/>
           </a:p>
@@ -16048,7 +16550,7 @@
                 <a:ea typeface="Calibri" pitchFamily="34" charset="-122"/>
                 <a:cs typeface="Calibri" pitchFamily="34" charset="-120"/>
               </a:rPr>
-              <a:t>NEXT LESSON</a:t>
+              <a:t>FORMATIVE EVALUATION</a:t>
             </a:r>
             <a:endParaRPr lang="en-US" sz="1400" dirty="0"/>
           </a:p>
@@ -16113,7 +16615,7 @@
                 <a:ea typeface="Times New Roman" pitchFamily="34" charset="-122"/>
                 <a:cs typeface="Times New Roman" pitchFamily="34" charset="-120"/>
               </a:rPr>
-              <a:t>Next Lesson</a:t>
+              <a:t>Expected Answer</a:t>
             </a:r>
             <a:endParaRPr lang="en-US" sz="3600" dirty="0"/>
           </a:p>
@@ -16137,17 +16639,17 @@
           <a:ln/>
         </p:spPr>
         <p:txBody>
-          <a:bodyPr wrap="square" lIns="0" tIns="0" rIns="0" bIns="0" rtlCol="0" anchor="ctr"/>
-          <a:lstStyle/>
-          <a:p>
-            <a:pPr algn="ctr" indent="0" marL="0">
+          <a:bodyPr wrap="square" lIns="0" tIns="0" rIns="0" bIns="0" rtlCol="0" anchor="t"/>
+          <a:lstStyle/>
+          <a:p>
+            <a:pPr algn="l" indent="0" marL="0">
               <a:spcAft>
                 <a:spcPts val="800"/>
               </a:spcAft>
               <a:buNone/>
             </a:pPr>
             <a:r>
-              <a:rPr lang="en-US" sz="4000" b="1" dirty="0">
+              <a:rPr lang="en-US" sz="4000" dirty="0">
                 <a:solidFill>
                   <a:srgbClr val="111111"/>
                 </a:solidFill>
@@ -16155,27 +16657,7 @@
                 <a:ea typeface="Times New Roman" pitchFamily="34" charset="-122"/>
                 <a:cs typeface="Times New Roman" pitchFamily="34" charset="-120"/>
               </a:rPr>
-              <a:t>Our next lesson will be on:</a:t>
-            </a:r>
-            <a:endParaRPr lang="en-US" sz="4000" dirty="0"/>
-          </a:p>
-          <a:p>
-            <a:pPr algn="ctr" indent="0" marL="0">
-              <a:spcAft>
-                <a:spcPts val="800"/>
-              </a:spcAft>
-              <a:buNone/>
-            </a:pPr>
-            <a:r>
-              <a:rPr lang="en-US" sz="4000" b="1" dirty="0">
-                <a:solidFill>
-                  <a:srgbClr val="990011"/>
-                </a:solidFill>
-                <a:latin typeface="Times New Roman" pitchFamily="34" charset="0"/>
-                <a:ea typeface="Times New Roman" pitchFamily="34" charset="-122"/>
-                <a:cs typeface="Times New Roman" pitchFamily="34" charset="-120"/>
-              </a:rPr>
-              <a:t>Lesson 43: Mineral Resources and their Management</a:t>
+              <a:t>Fishing licences and fish farming.</a:t>
             </a:r>
             <a:endParaRPr lang="en-US" sz="4000" dirty="0"/>
           </a:p>
@@ -16287,6 +16769,749 @@
                 <a:ea typeface="Calibri" pitchFamily="34" charset="-122"/>
                 <a:cs typeface="Calibri" pitchFamily="34" charset="-120"/>
               </a:rPr>
+              <a:t>REMEDIATION</a:t>
+            </a:r>
+            <a:endParaRPr lang="en-US" sz="1400" dirty="0"/>
+          </a:p>
+        </p:txBody>
+      </p:sp>
+      <p:pic>
+        <p:nvPicPr>
+          <p:cNvPr id="3" name="Image 0" descr="/home/claude/f4/img/minesec_sheet.png">    </p:cNvPr>
+          <p:cNvPicPr>
+            <a:picLocks noChangeAspect="1"/>
+          </p:cNvPicPr>
+          <p:nvPr/>
+        </p:nvPicPr>
+        <p:blipFill>
+          <a:blip r:embed="rId1"/>
+          <a:stretch>
+            <a:fillRect/>
+          </a:stretch>
+        </p:blipFill>
+        <p:spPr>
+          <a:xfrm>
+            <a:off x="0" y="658368"/>
+            <a:ext cx="2468880" cy="5833872"/>
+          </a:xfrm>
+          <a:prstGeom prst="rect">
+            <a:avLst/>
+          </a:prstGeom>
+        </p:spPr>
+      </p:pic>
+      <p:sp>
+        <p:nvSpPr>
+          <p:cNvPr id="4" name="Text 1"/>
+          <p:cNvSpPr/>
+          <p:nvPr/>
+        </p:nvSpPr>
+        <p:spPr>
+          <a:xfrm>
+            <a:off x="2697480" y="1005840"/>
+            <a:ext cx="9174175" cy="731520"/>
+          </a:xfrm>
+          <a:prstGeom prst="rect">
+            <a:avLst/>
+          </a:prstGeom>
+          <a:noFill/>
+          <a:ln/>
+        </p:spPr>
+        <p:txBody>
+          <a:bodyPr wrap="square" lIns="0" tIns="0" rIns="0" bIns="0" rtlCol="0" anchor="ctr">
+            <a:normAutofit/>
+          </a:bodyPr>
+          <a:lstStyle/>
+          <a:p>
+            <a:pPr algn="ctr" indent="0" marL="0">
+              <a:buNone/>
+            </a:pPr>
+            <a:r>
+              <a:rPr lang="en-US" sz="3600" b="1" dirty="0">
+                <a:solidFill>
+                  <a:srgbClr val="990011"/>
+                </a:solidFill>
+                <a:latin typeface="Times New Roman" pitchFamily="34" charset="0"/>
+                <a:ea typeface="Times New Roman" pitchFamily="34" charset="-122"/>
+                <a:cs typeface="Times New Roman" pitchFamily="34" charset="-120"/>
+              </a:rPr>
+              <a:t>Remediation</a:t>
+            </a:r>
+            <a:endParaRPr lang="en-US" sz="3600" dirty="0"/>
+          </a:p>
+        </p:txBody>
+      </p:sp>
+      <p:sp>
+        <p:nvSpPr>
+          <p:cNvPr id="5" name="Text 2"/>
+          <p:cNvSpPr/>
+          <p:nvPr/>
+        </p:nvSpPr>
+        <p:spPr>
+          <a:xfrm>
+            <a:off x="2697480" y="1783080"/>
+            <a:ext cx="9174175" cy="4663440"/>
+          </a:xfrm>
+          <a:prstGeom prst="rect">
+            <a:avLst/>
+          </a:prstGeom>
+          <a:noFill/>
+          <a:ln/>
+        </p:spPr>
+        <p:txBody>
+          <a:bodyPr wrap="square" lIns="0" tIns="0" rIns="0" bIns="0" rtlCol="0" anchor="t"/>
+          <a:lstStyle/>
+          <a:p>
+            <a:pPr algn="l" indent="0" marL="0">
+              <a:spcAft>
+                <a:spcPts val="800"/>
+              </a:spcAft>
+              <a:buNone/>
+            </a:pPr>
+            <a:r>
+              <a:rPr lang="en-US" sz="4000" b="1" dirty="0">
+                <a:solidFill>
+                  <a:srgbClr val="111111"/>
+                </a:solidFill>
+                <a:latin typeface="Times New Roman" pitchFamily="34" charset="0"/>
+                <a:ea typeface="Times New Roman" pitchFamily="34" charset="-122"/>
+                <a:cs typeface="Times New Roman" pitchFamily="34" charset="-120"/>
+              </a:rPr>
+              <a:t>Fill in the blanks:</a:t>
+            </a:r>
+            <a:endParaRPr lang="en-US" sz="4000" dirty="0"/>
+          </a:p>
+          <a:p>
+            <a:pPr algn="l" marL="342900" indent="-342900">
+              <a:spcAft>
+                <a:spcPts val="800"/>
+              </a:spcAft>
+              <a:buSzPct val="100000"/>
+              <a:buFont typeface="+mj-lt"/>
+              <a:buAutoNum type="arabicPeriod" startAt="1"/>
+            </a:pPr>
+            <a:r>
+              <a:rPr lang="en-US" sz="4000" dirty="0">
+                <a:solidFill>
+                  <a:srgbClr val="111111"/>
+                </a:solidFill>
+                <a:latin typeface="Times New Roman" pitchFamily="34" charset="0"/>
+                <a:ea typeface="Times New Roman" pitchFamily="34" charset="-122"/>
+                <a:cs typeface="Times New Roman" pitchFamily="34" charset="-120"/>
+              </a:rPr>
+              <a:t>Small-scale fishing is ______ fishing.</a:t>
+            </a:r>
+            <a:endParaRPr lang="en-US" sz="4000" dirty="0"/>
+          </a:p>
+          <a:p>
+            <a:pPr algn="l" marL="342900" indent="-342900">
+              <a:spcAft>
+                <a:spcPts val="800"/>
+              </a:spcAft>
+              <a:buSzPct val="100000"/>
+              <a:buFont typeface="+mj-lt"/>
+              <a:buAutoNum type="arabicPeriod" startAt="1"/>
+            </a:pPr>
+            <a:r>
+              <a:rPr lang="en-US" sz="4000" dirty="0">
+                <a:solidFill>
+                  <a:srgbClr val="111111"/>
+                </a:solidFill>
+                <a:latin typeface="Times New Roman" pitchFamily="34" charset="0"/>
+                <a:ea typeface="Times New Roman" pitchFamily="34" charset="-122"/>
+                <a:cs typeface="Times New Roman" pitchFamily="34" charset="-120"/>
+              </a:rPr>
+              <a:t>A large fishing boat is a ______.</a:t>
+            </a:r>
+            <a:endParaRPr lang="en-US" sz="4000" dirty="0"/>
+          </a:p>
+          <a:p>
+            <a:pPr algn="l" marL="342900" indent="-342900">
+              <a:spcAft>
+                <a:spcPts val="800"/>
+              </a:spcAft>
+              <a:buSzPct val="100000"/>
+              <a:buFont typeface="+mj-lt"/>
+              <a:buAutoNum type="arabicPeriod" startAt="1"/>
+            </a:pPr>
+            <a:r>
+              <a:rPr lang="en-US" sz="4000" dirty="0">
+                <a:solidFill>
+                  <a:srgbClr val="111111"/>
+                </a:solidFill>
+                <a:latin typeface="Times New Roman" pitchFamily="34" charset="0"/>
+                <a:ea typeface="Times New Roman" pitchFamily="34" charset="-122"/>
+                <a:cs typeface="Times New Roman" pitchFamily="34" charset="-120"/>
+              </a:rPr>
+              <a:t>Fish from Lagdo is often ______ to preserve it.</a:t>
+            </a:r>
+            <a:endParaRPr lang="en-US" sz="4000" dirty="0"/>
+          </a:p>
+        </p:txBody>
+      </p:sp>
+      <p:sp>
+        <p:nvSpPr>
+          <p:cNvPr id="25" name="Slide Number Placeholder 0"/>
+          <p:cNvSpPr>
+            <a:spLocks noGrp="1"/>
+          </p:cNvSpPr>
+          <p:nvPr>
+            <p:ph type="sldNum" sz="quarter" idx="4294967295"/>
+          </p:nvPr>
+        </p:nvSpPr>
+        <p:spPr>
+          <a:xfrm>
+            <a:off x="27432" y="91440"/>
+            <a:ext cx="585216" cy="475488"/>
+          </a:xfrm>
+          <a:prstGeom prst="rect">
+            <a:avLst/>
+          </a:prstGeom>
+          <a:extLst>
+            <a:ext uri="{C572A759-6A51-4108-AA02-DFA0A04FC94B}">
+              <ma14:wrappingTextBoxFlag xmlns:ma14="http://schemas.microsoft.com/office/mac/drawingml/2011/main" val="0"/>
+            </a:ext>
+          </a:extLst>
+        </p:spPr>
+        <p:txBody>
+          <a:bodyPr/>
+          <a:lstStyle>
+            <a:lvl1pPr>
+              <a:defRPr sz="2000">
+                <a:solidFill>
+                  <a:srgbClr val="FFFFFF"/>
+                </a:solidFill>
+                <a:latin typeface="Calibri"/>
+                <a:ea typeface="Calibri"/>
+                <a:cs typeface="Calibri"/>
+              </a:defRPr>
+            </a:lvl1pPr>
+          </a:lstStyle>
+          <a:p>
+            <a:pPr algn="ctr"/>
+            <a:fld id="{F7021451-1387-4CA6-816F-3879F97B5CBC}" type="slidenum">
+              <a:rPr b="1" lang="en-US"/>
+              <a:t>46</a:t>
+            </a:fld>
+            <a:endParaRPr lang="en-US"/>
+          </a:p>
+        </p:txBody>
+      </p:sp>
+    </p:spTree>
+  </p:cSld>
+  <p:clrMapOvr>
+    <a:masterClrMapping/>
+  </p:clrMapOvr>
+</p:sld>
+</file>
+
+<file path=ppt/slides/slide47.xml><?xml version="1.0" encoding="utf-8"?>
+<p:sld xmlns:a="http://schemas.openxmlformats.org/drawingml/2006/main" xmlns:r="http://schemas.openxmlformats.org/officeDocument/2006/relationships" xmlns:p="http://schemas.openxmlformats.org/presentationml/2006/main">
+  <p:cSld name="Slide 47">
+    <p:spTree>
+      <p:nvGrpSpPr>
+        <p:cNvPr id="1" name=""/>
+        <p:cNvGrpSpPr/>
+        <p:nvPr/>
+      </p:nvGrpSpPr>
+      <p:grpSpPr>
+        <a:xfrm>
+          <a:off x="0" y="0"/>
+          <a:ext cx="0" cy="0"/>
+          <a:chOff x="0" y="0"/>
+          <a:chExt cx="0" cy="0"/>
+        </a:xfrm>
+      </p:grpSpPr>
+      <p:sp>
+        <p:nvSpPr>
+          <p:cNvPr id="2" name="Text 0"/>
+          <p:cNvSpPr/>
+          <p:nvPr/>
+        </p:nvSpPr>
+        <p:spPr>
+          <a:xfrm>
+            <a:off x="457200" y="713232"/>
+            <a:ext cx="11368735" cy="274320"/>
+          </a:xfrm>
+          <a:prstGeom prst="rect">
+            <a:avLst/>
+          </a:prstGeom>
+          <a:noFill/>
+          <a:ln/>
+        </p:spPr>
+        <p:txBody>
+          <a:bodyPr wrap="square" lIns="0" tIns="0" rIns="0" bIns="0" rtlCol="0" anchor="ctr"/>
+          <a:lstStyle/>
+          <a:p>
+            <a:pPr algn="r" indent="0" marL="0">
+              <a:buNone/>
+            </a:pPr>
+            <a:r>
+              <a:rPr lang="en-US" sz="1400" b="1" dirty="0">
+                <a:solidFill>
+                  <a:srgbClr val="1C3F6E"/>
+                </a:solidFill>
+                <a:latin typeface="Calibri" pitchFamily="34" charset="0"/>
+                <a:ea typeface="Calibri" pitchFamily="34" charset="-122"/>
+                <a:cs typeface="Calibri" pitchFamily="34" charset="-120"/>
+              </a:rPr>
+              <a:t>HOMEWORK</a:t>
+            </a:r>
+            <a:endParaRPr lang="en-US" sz="1400" dirty="0"/>
+          </a:p>
+        </p:txBody>
+      </p:sp>
+      <p:pic>
+        <p:nvPicPr>
+          <p:cNvPr id="3" name="Image 0" descr="/home/claude/f4/img/minesec_sheet.png">    </p:cNvPr>
+          <p:cNvPicPr>
+            <a:picLocks noChangeAspect="1"/>
+          </p:cNvPicPr>
+          <p:nvPr/>
+        </p:nvPicPr>
+        <p:blipFill>
+          <a:blip r:embed="rId1"/>
+          <a:stretch>
+            <a:fillRect/>
+          </a:stretch>
+        </p:blipFill>
+        <p:spPr>
+          <a:xfrm>
+            <a:off x="0" y="658368"/>
+            <a:ext cx="5120640" cy="5833872"/>
+          </a:xfrm>
+          <a:prstGeom prst="rect">
+            <a:avLst/>
+          </a:prstGeom>
+        </p:spPr>
+      </p:pic>
+      <p:sp>
+        <p:nvSpPr>
+          <p:cNvPr id="4" name="Text 1"/>
+          <p:cNvSpPr/>
+          <p:nvPr/>
+        </p:nvSpPr>
+        <p:spPr>
+          <a:xfrm>
+            <a:off x="5349240" y="1005840"/>
+            <a:ext cx="6522415" cy="731520"/>
+          </a:xfrm>
+          <a:prstGeom prst="rect">
+            <a:avLst/>
+          </a:prstGeom>
+          <a:noFill/>
+          <a:ln/>
+        </p:spPr>
+        <p:txBody>
+          <a:bodyPr wrap="square" lIns="0" tIns="0" rIns="0" bIns="0" rtlCol="0" anchor="ctr">
+            <a:normAutofit/>
+          </a:bodyPr>
+          <a:lstStyle/>
+          <a:p>
+            <a:pPr algn="ctr" indent="0" marL="0">
+              <a:buNone/>
+            </a:pPr>
+            <a:r>
+              <a:rPr lang="en-US" sz="3600" b="1" dirty="0">
+                <a:solidFill>
+                  <a:srgbClr val="990011"/>
+                </a:solidFill>
+                <a:latin typeface="Times New Roman" pitchFamily="34" charset="0"/>
+                <a:ea typeface="Times New Roman" pitchFamily="34" charset="-122"/>
+                <a:cs typeface="Times New Roman" pitchFamily="34" charset="-120"/>
+              </a:rPr>
+              <a:t>Homework</a:t>
+            </a:r>
+            <a:endParaRPr lang="en-US" sz="3600" dirty="0"/>
+          </a:p>
+        </p:txBody>
+      </p:sp>
+      <p:sp>
+        <p:nvSpPr>
+          <p:cNvPr id="5" name="Text 2"/>
+          <p:cNvSpPr/>
+          <p:nvPr/>
+        </p:nvSpPr>
+        <p:spPr>
+          <a:xfrm>
+            <a:off x="5349240" y="1783080"/>
+            <a:ext cx="6522415" cy="4663440"/>
+          </a:xfrm>
+          <a:prstGeom prst="rect">
+            <a:avLst/>
+          </a:prstGeom>
+          <a:noFill/>
+          <a:ln/>
+        </p:spPr>
+        <p:txBody>
+          <a:bodyPr wrap="square" lIns="0" tIns="0" rIns="0" bIns="0" rtlCol="0" anchor="t"/>
+          <a:lstStyle/>
+          <a:p>
+            <a:pPr algn="l" indent="0" marL="0">
+              <a:spcAft>
+                <a:spcPts val="800"/>
+              </a:spcAft>
+              <a:buNone/>
+            </a:pPr>
+            <a:r>
+              <a:rPr lang="en-US" sz="4000" dirty="0">
+                <a:solidFill>
+                  <a:srgbClr val="111111"/>
+                </a:solidFill>
+                <a:latin typeface="Times New Roman" pitchFamily="34" charset="0"/>
+                <a:ea typeface="Times New Roman" pitchFamily="34" charset="-122"/>
+                <a:cs typeface="Times New Roman" pitchFamily="34" charset="-120"/>
+              </a:rPr>
+              <a:t>Visit a fish market and write the types of fish sold and where they come from.</a:t>
+            </a:r>
+            <a:endParaRPr lang="en-US" sz="4000" dirty="0"/>
+          </a:p>
+        </p:txBody>
+      </p:sp>
+      <p:sp>
+        <p:nvSpPr>
+          <p:cNvPr id="25" name="Slide Number Placeholder 0"/>
+          <p:cNvSpPr>
+            <a:spLocks noGrp="1"/>
+          </p:cNvSpPr>
+          <p:nvPr>
+            <p:ph type="sldNum" sz="quarter" idx="4294967295"/>
+          </p:nvPr>
+        </p:nvSpPr>
+        <p:spPr>
+          <a:xfrm>
+            <a:off x="27432" y="91440"/>
+            <a:ext cx="585216" cy="475488"/>
+          </a:xfrm>
+          <a:prstGeom prst="rect">
+            <a:avLst/>
+          </a:prstGeom>
+          <a:extLst>
+            <a:ext uri="{C572A759-6A51-4108-AA02-DFA0A04FC94B}">
+              <ma14:wrappingTextBoxFlag xmlns:ma14="http://schemas.microsoft.com/office/mac/drawingml/2011/main" val="0"/>
+            </a:ext>
+          </a:extLst>
+        </p:spPr>
+        <p:txBody>
+          <a:bodyPr/>
+          <a:lstStyle>
+            <a:lvl1pPr>
+              <a:defRPr sz="2000">
+                <a:solidFill>
+                  <a:srgbClr val="FFFFFF"/>
+                </a:solidFill>
+                <a:latin typeface="Calibri"/>
+                <a:ea typeface="Calibri"/>
+                <a:cs typeface="Calibri"/>
+              </a:defRPr>
+            </a:lvl1pPr>
+          </a:lstStyle>
+          <a:p>
+            <a:pPr algn="ctr"/>
+            <a:fld id="{F7021451-1387-4CA6-816F-3879F97B5CBC}" type="slidenum">
+              <a:rPr b="1" lang="en-US"/>
+              <a:t>47</a:t>
+            </a:fld>
+            <a:endParaRPr lang="en-US"/>
+          </a:p>
+        </p:txBody>
+      </p:sp>
+    </p:spTree>
+  </p:cSld>
+  <p:clrMapOvr>
+    <a:masterClrMapping/>
+  </p:clrMapOvr>
+</p:sld>
+</file>
+
+<file path=ppt/slides/slide48.xml><?xml version="1.0" encoding="utf-8"?>
+<p:sld xmlns:a="http://schemas.openxmlformats.org/drawingml/2006/main" xmlns:r="http://schemas.openxmlformats.org/officeDocument/2006/relationships" xmlns:p="http://schemas.openxmlformats.org/presentationml/2006/main">
+  <p:cSld name="Slide 48">
+    <p:spTree>
+      <p:nvGrpSpPr>
+        <p:cNvPr id="1" name=""/>
+        <p:cNvGrpSpPr/>
+        <p:nvPr/>
+      </p:nvGrpSpPr>
+      <p:grpSpPr>
+        <a:xfrm>
+          <a:off x="0" y="0"/>
+          <a:ext cx="0" cy="0"/>
+          <a:chOff x="0" y="0"/>
+          <a:chExt cx="0" cy="0"/>
+        </a:xfrm>
+      </p:grpSpPr>
+      <p:sp>
+        <p:nvSpPr>
+          <p:cNvPr id="2" name="Text 0"/>
+          <p:cNvSpPr/>
+          <p:nvPr/>
+        </p:nvSpPr>
+        <p:spPr>
+          <a:xfrm>
+            <a:off x="457200" y="713232"/>
+            <a:ext cx="11368735" cy="274320"/>
+          </a:xfrm>
+          <a:prstGeom prst="rect">
+            <a:avLst/>
+          </a:prstGeom>
+          <a:noFill/>
+          <a:ln/>
+        </p:spPr>
+        <p:txBody>
+          <a:bodyPr wrap="square" lIns="0" tIns="0" rIns="0" bIns="0" rtlCol="0" anchor="ctr"/>
+          <a:lstStyle/>
+          <a:p>
+            <a:pPr algn="r" indent="0" marL="0">
+              <a:buNone/>
+            </a:pPr>
+            <a:r>
+              <a:rPr lang="en-US" sz="1400" b="1" dirty="0">
+                <a:solidFill>
+                  <a:srgbClr val="1C3F6E"/>
+                </a:solidFill>
+                <a:latin typeface="Calibri" pitchFamily="34" charset="0"/>
+                <a:ea typeface="Calibri" pitchFamily="34" charset="-122"/>
+                <a:cs typeface="Calibri" pitchFamily="34" charset="-120"/>
+              </a:rPr>
+              <a:t>NEXT LESSON</a:t>
+            </a:r>
+            <a:endParaRPr lang="en-US" sz="1400" dirty="0"/>
+          </a:p>
+        </p:txBody>
+      </p:sp>
+      <p:pic>
+        <p:nvPicPr>
+          <p:cNvPr id="3" name="Image 0" descr="/home/claude/f4/img/minesec_sheet.png">    </p:cNvPr>
+          <p:cNvPicPr>
+            <a:picLocks noChangeAspect="1"/>
+          </p:cNvPicPr>
+          <p:nvPr/>
+        </p:nvPicPr>
+        <p:blipFill>
+          <a:blip r:embed="rId1"/>
+          <a:stretch>
+            <a:fillRect/>
+          </a:stretch>
+        </p:blipFill>
+        <p:spPr>
+          <a:xfrm>
+            <a:off x="0" y="658368"/>
+            <a:ext cx="5120640" cy="5833872"/>
+          </a:xfrm>
+          <a:prstGeom prst="rect">
+            <a:avLst/>
+          </a:prstGeom>
+        </p:spPr>
+      </p:pic>
+      <p:sp>
+        <p:nvSpPr>
+          <p:cNvPr id="4" name="Text 1"/>
+          <p:cNvSpPr/>
+          <p:nvPr/>
+        </p:nvSpPr>
+        <p:spPr>
+          <a:xfrm>
+            <a:off x="5349240" y="1005840"/>
+            <a:ext cx="6522415" cy="731520"/>
+          </a:xfrm>
+          <a:prstGeom prst="rect">
+            <a:avLst/>
+          </a:prstGeom>
+          <a:noFill/>
+          <a:ln/>
+        </p:spPr>
+        <p:txBody>
+          <a:bodyPr wrap="square" lIns="0" tIns="0" rIns="0" bIns="0" rtlCol="0" anchor="ctr">
+            <a:normAutofit/>
+          </a:bodyPr>
+          <a:lstStyle/>
+          <a:p>
+            <a:pPr algn="ctr" indent="0" marL="0">
+              <a:buNone/>
+            </a:pPr>
+            <a:r>
+              <a:rPr lang="en-US" sz="3600" b="1" dirty="0">
+                <a:solidFill>
+                  <a:srgbClr val="990011"/>
+                </a:solidFill>
+                <a:latin typeface="Times New Roman" pitchFamily="34" charset="0"/>
+                <a:ea typeface="Times New Roman" pitchFamily="34" charset="-122"/>
+                <a:cs typeface="Times New Roman" pitchFamily="34" charset="-120"/>
+              </a:rPr>
+              <a:t>Next Lesson</a:t>
+            </a:r>
+            <a:endParaRPr lang="en-US" sz="3600" dirty="0"/>
+          </a:p>
+        </p:txBody>
+      </p:sp>
+      <p:sp>
+        <p:nvSpPr>
+          <p:cNvPr id="5" name="Text 2"/>
+          <p:cNvSpPr/>
+          <p:nvPr/>
+        </p:nvSpPr>
+        <p:spPr>
+          <a:xfrm>
+            <a:off x="5349240" y="1783080"/>
+            <a:ext cx="6522415" cy="4663440"/>
+          </a:xfrm>
+          <a:prstGeom prst="rect">
+            <a:avLst/>
+          </a:prstGeom>
+          <a:noFill/>
+          <a:ln/>
+        </p:spPr>
+        <p:txBody>
+          <a:bodyPr wrap="square" lIns="0" tIns="0" rIns="0" bIns="0" rtlCol="0" anchor="ctr"/>
+          <a:lstStyle/>
+          <a:p>
+            <a:pPr algn="ctr" indent="0" marL="0">
+              <a:spcAft>
+                <a:spcPts val="800"/>
+              </a:spcAft>
+              <a:buNone/>
+            </a:pPr>
+            <a:r>
+              <a:rPr lang="en-US" sz="4000" b="1" dirty="0">
+                <a:solidFill>
+                  <a:srgbClr val="111111"/>
+                </a:solidFill>
+                <a:latin typeface="Times New Roman" pitchFamily="34" charset="0"/>
+                <a:ea typeface="Times New Roman" pitchFamily="34" charset="-122"/>
+                <a:cs typeface="Times New Roman" pitchFamily="34" charset="-120"/>
+              </a:rPr>
+              <a:t>Our next lesson will be on:</a:t>
+            </a:r>
+            <a:endParaRPr lang="en-US" sz="4000" dirty="0"/>
+          </a:p>
+          <a:p>
+            <a:pPr algn="ctr" indent="0" marL="0">
+              <a:spcAft>
+                <a:spcPts val="800"/>
+              </a:spcAft>
+              <a:buNone/>
+            </a:pPr>
+            <a:r>
+              <a:rPr lang="en-US" sz="4000" b="1" dirty="0">
+                <a:solidFill>
+                  <a:srgbClr val="990011"/>
+                </a:solidFill>
+                <a:latin typeface="Times New Roman" pitchFamily="34" charset="0"/>
+                <a:ea typeface="Times New Roman" pitchFamily="34" charset="-122"/>
+                <a:cs typeface="Times New Roman" pitchFamily="34" charset="-120"/>
+              </a:rPr>
+              <a:t>Lesson 43: Mineral Resources and their Management</a:t>
+            </a:r>
+            <a:endParaRPr lang="en-US" sz="4000" dirty="0"/>
+          </a:p>
+        </p:txBody>
+      </p:sp>
+      <p:sp>
+        <p:nvSpPr>
+          <p:cNvPr id="25" name="Slide Number Placeholder 0"/>
+          <p:cNvSpPr>
+            <a:spLocks noGrp="1"/>
+          </p:cNvSpPr>
+          <p:nvPr>
+            <p:ph type="sldNum" sz="quarter" idx="4294967295"/>
+          </p:nvPr>
+        </p:nvSpPr>
+        <p:spPr>
+          <a:xfrm>
+            <a:off x="27432" y="91440"/>
+            <a:ext cx="585216" cy="475488"/>
+          </a:xfrm>
+          <a:prstGeom prst="rect">
+            <a:avLst/>
+          </a:prstGeom>
+          <a:extLst>
+            <a:ext uri="{C572A759-6A51-4108-AA02-DFA0A04FC94B}">
+              <ma14:wrappingTextBoxFlag xmlns:ma14="http://schemas.microsoft.com/office/mac/drawingml/2011/main" val="0"/>
+            </a:ext>
+          </a:extLst>
+        </p:spPr>
+        <p:txBody>
+          <a:bodyPr/>
+          <a:lstStyle>
+            <a:lvl1pPr>
+              <a:defRPr sz="2000">
+                <a:solidFill>
+                  <a:srgbClr val="FFFFFF"/>
+                </a:solidFill>
+                <a:latin typeface="Calibri"/>
+                <a:ea typeface="Calibri"/>
+                <a:cs typeface="Calibri"/>
+              </a:defRPr>
+            </a:lvl1pPr>
+          </a:lstStyle>
+          <a:p>
+            <a:pPr algn="ctr"/>
+            <a:fld id="{F7021451-1387-4CA6-816F-3879F97B5CBC}" type="slidenum">
+              <a:rPr b="1" lang="en-US"/>
+              <a:t>48</a:t>
+            </a:fld>
+            <a:endParaRPr lang="en-US"/>
+          </a:p>
+        </p:txBody>
+      </p:sp>
+    </p:spTree>
+  </p:cSld>
+  <p:clrMapOvr>
+    <a:masterClrMapping/>
+  </p:clrMapOvr>
+</p:sld>
+</file>
+
+<file path=ppt/slides/slide49.xml><?xml version="1.0" encoding="utf-8"?>
+<p:sld xmlns:a="http://schemas.openxmlformats.org/drawingml/2006/main" xmlns:r="http://schemas.openxmlformats.org/officeDocument/2006/relationships" xmlns:p="http://schemas.openxmlformats.org/presentationml/2006/main">
+  <p:cSld name="Slide 49">
+    <p:spTree>
+      <p:nvGrpSpPr>
+        <p:cNvPr id="1" name=""/>
+        <p:cNvGrpSpPr/>
+        <p:nvPr/>
+      </p:nvGrpSpPr>
+      <p:grpSpPr>
+        <a:xfrm>
+          <a:off x="0" y="0"/>
+          <a:ext cx="0" cy="0"/>
+          <a:chOff x="0" y="0"/>
+          <a:chExt cx="0" cy="0"/>
+        </a:xfrm>
+      </p:grpSpPr>
+      <p:sp>
+        <p:nvSpPr>
+          <p:cNvPr id="2" name="Text 0"/>
+          <p:cNvSpPr/>
+          <p:nvPr/>
+        </p:nvSpPr>
+        <p:spPr>
+          <a:xfrm>
+            <a:off x="457200" y="713232"/>
+            <a:ext cx="11368735" cy="274320"/>
+          </a:xfrm>
+          <a:prstGeom prst="rect">
+            <a:avLst/>
+          </a:prstGeom>
+          <a:noFill/>
+          <a:ln/>
+        </p:spPr>
+        <p:txBody>
+          <a:bodyPr wrap="square" lIns="0" tIns="0" rIns="0" bIns="0" rtlCol="0" anchor="ctr"/>
+          <a:lstStyle/>
+          <a:p>
+            <a:pPr algn="r" indent="0" marL="0">
+              <a:buNone/>
+            </a:pPr>
+            <a:r>
+              <a:rPr lang="en-US" sz="1400" b="1" dirty="0">
+                <a:solidFill>
+                  <a:srgbClr val="1C3F6E"/>
+                </a:solidFill>
+                <a:latin typeface="Calibri" pitchFamily="34" charset="0"/>
+                <a:ea typeface="Calibri" pitchFamily="34" charset="-122"/>
+                <a:cs typeface="Calibri" pitchFamily="34" charset="-120"/>
+              </a:rPr>
               <a:t>BILINGUAL GAME</a:t>
             </a:r>
             <a:endParaRPr lang="en-US" sz="1400" dirty="0"/>
@@ -16334,7 +17559,7 @@
       </p:sp>
       <p:graphicFrame>
         <p:nvGraphicFramePr>
-          <p:cNvPr id="47" name="Table 0"/>
+          <p:cNvPr id="50" name="Table 0"/>
           <p:cNvGraphicFramePr>
             <a:graphicFrameLocks noGrp="1"/>
           </p:cNvGraphicFramePr>
@@ -17370,7 +18595,7 @@
             <a:pPr algn="ctr"/>
             <a:fld id="{F7021451-1387-4CA6-816F-3879F97B5CBC}" type="slidenum">
               <a:rPr b="1" lang="en-US"/>
-              <a:t>46</a:t>
+              <a:t>49</a:t>
             </a:fld>
             <a:endParaRPr lang="en-US"/>
           </a:p>
@@ -17384,9 +18609,9 @@
 </p:sld>
 </file>
 
-<file path=ppt/slides/slide47.xml><?xml version="1.0" encoding="utf-8"?>
+<file path=ppt/slides/slide5.xml><?xml version="1.0" encoding="utf-8"?>
 <p:sld xmlns:a="http://schemas.openxmlformats.org/drawingml/2006/main" xmlns:r="http://schemas.openxmlformats.org/officeDocument/2006/relationships" xmlns:p="http://schemas.openxmlformats.org/presentationml/2006/main">
-  <p:cSld name="Slide 47">
+  <p:cSld name="Slide 5">
     <p:spTree>
       <p:nvGrpSpPr>
         <p:cNvPr id="1" name=""/>
@@ -17434,6 +18659,225 @@
                 <a:ea typeface="Calibri" pitchFamily="34" charset="-122"/>
                 <a:cs typeface="Calibri" pitchFamily="34" charset="-120"/>
               </a:rPr>
+              <a:t>HOMEWORK CORRECTION</a:t>
+            </a:r>
+            <a:endParaRPr lang="en-US" sz="1400" dirty="0"/>
+          </a:p>
+        </p:txBody>
+      </p:sp>
+      <p:pic>
+        <p:nvPicPr>
+          <p:cNvPr id="3" name="Image 0" descr="/home/claude/f4/img/minesec_sheet.png">    </p:cNvPr>
+          <p:cNvPicPr>
+            <a:picLocks noChangeAspect="1"/>
+          </p:cNvPicPr>
+          <p:nvPr/>
+        </p:nvPicPr>
+        <p:blipFill>
+          <a:blip r:embed="rId1"/>
+          <a:stretch>
+            <a:fillRect/>
+          </a:stretch>
+        </p:blipFill>
+        <p:spPr>
+          <a:xfrm>
+            <a:off x="0" y="658368"/>
+            <a:ext cx="5120640" cy="5833872"/>
+          </a:xfrm>
+          <a:prstGeom prst="rect">
+            <a:avLst/>
+          </a:prstGeom>
+        </p:spPr>
+      </p:pic>
+      <p:sp>
+        <p:nvSpPr>
+          <p:cNvPr id="4" name="Text 1"/>
+          <p:cNvSpPr/>
+          <p:nvPr/>
+        </p:nvSpPr>
+        <p:spPr>
+          <a:xfrm>
+            <a:off x="5349240" y="1005840"/>
+            <a:ext cx="6522415" cy="731520"/>
+          </a:xfrm>
+          <a:prstGeom prst="rect">
+            <a:avLst/>
+          </a:prstGeom>
+          <a:noFill/>
+          <a:ln/>
+        </p:spPr>
+        <p:txBody>
+          <a:bodyPr wrap="square" lIns="0" tIns="0" rIns="0" bIns="0" rtlCol="0" anchor="ctr">
+            <a:normAutofit/>
+          </a:bodyPr>
+          <a:lstStyle/>
+          <a:p>
+            <a:pPr algn="ctr" indent="0" marL="0">
+              <a:buNone/>
+            </a:pPr>
+            <a:r>
+              <a:rPr lang="en-US" sz="3600" b="1" dirty="0">
+                <a:solidFill>
+                  <a:srgbClr val="990011"/>
+                </a:solidFill>
+                <a:latin typeface="Times New Roman" pitchFamily="34" charset="0"/>
+                <a:ea typeface="Times New Roman" pitchFamily="34" charset="-122"/>
+                <a:cs typeface="Times New Roman" pitchFamily="34" charset="-120"/>
+              </a:rPr>
+              <a:t>Correction: Possible Answer</a:t>
+            </a:r>
+            <a:endParaRPr lang="en-US" sz="3600" dirty="0"/>
+          </a:p>
+        </p:txBody>
+      </p:sp>
+      <p:sp>
+        <p:nvSpPr>
+          <p:cNvPr id="5" name="Text 2"/>
+          <p:cNvSpPr/>
+          <p:nvPr/>
+        </p:nvSpPr>
+        <p:spPr>
+          <a:xfrm>
+            <a:off x="5349240" y="1783080"/>
+            <a:ext cx="6522415" cy="4663440"/>
+          </a:xfrm>
+          <a:prstGeom prst="rect">
+            <a:avLst/>
+          </a:prstGeom>
+          <a:noFill/>
+          <a:ln/>
+        </p:spPr>
+        <p:txBody>
+          <a:bodyPr wrap="square" lIns="0" tIns="0" rIns="0" bIns="0" rtlCol="0" anchor="t"/>
+          <a:lstStyle/>
+          <a:p>
+            <a:pPr algn="l" indent="0" marL="0">
+              <a:spcAft>
+                <a:spcPts val="800"/>
+              </a:spcAft>
+              <a:buNone/>
+            </a:pPr>
+            <a:r>
+              <a:rPr lang="en-US" sz="4000" dirty="0">
+                <a:solidFill>
+                  <a:srgbClr val="111111"/>
+                </a:solidFill>
+                <a:latin typeface="Times New Roman" pitchFamily="34" charset="0"/>
+                <a:ea typeface="Times New Roman" pitchFamily="34" charset="-122"/>
+                <a:cs typeface="Times New Roman" pitchFamily="34" charset="-120"/>
+              </a:rPr>
+              <a:t>The Lagdo lake, the River Benue and the coast of Kribi and Limbe (also Lake Chad, the Wouri estuary).</a:t>
+            </a:r>
+            <a:endParaRPr lang="en-US" sz="4000" dirty="0"/>
+          </a:p>
+        </p:txBody>
+      </p:sp>
+      <p:sp>
+        <p:nvSpPr>
+          <p:cNvPr id="25" name="Slide Number Placeholder 0"/>
+          <p:cNvSpPr>
+            <a:spLocks noGrp="1"/>
+          </p:cNvSpPr>
+          <p:nvPr>
+            <p:ph type="sldNum" sz="quarter" idx="4294967295"/>
+          </p:nvPr>
+        </p:nvSpPr>
+        <p:spPr>
+          <a:xfrm>
+            <a:off x="27432" y="91440"/>
+            <a:ext cx="585216" cy="475488"/>
+          </a:xfrm>
+          <a:prstGeom prst="rect">
+            <a:avLst/>
+          </a:prstGeom>
+          <a:extLst>
+            <a:ext uri="{C572A759-6A51-4108-AA02-DFA0A04FC94B}">
+              <ma14:wrappingTextBoxFlag xmlns:ma14="http://schemas.microsoft.com/office/mac/drawingml/2011/main" val="0"/>
+            </a:ext>
+          </a:extLst>
+        </p:spPr>
+        <p:txBody>
+          <a:bodyPr/>
+          <a:lstStyle>
+            <a:lvl1pPr>
+              <a:defRPr sz="2000">
+                <a:solidFill>
+                  <a:srgbClr val="FFFFFF"/>
+                </a:solidFill>
+                <a:latin typeface="Calibri"/>
+                <a:ea typeface="Calibri"/>
+                <a:cs typeface="Calibri"/>
+              </a:defRPr>
+            </a:lvl1pPr>
+          </a:lstStyle>
+          <a:p>
+            <a:pPr algn="ctr"/>
+            <a:fld id="{F7021451-1387-4CA6-816F-3879F97B5CBC}" type="slidenum">
+              <a:rPr b="1" lang="en-US"/>
+              <a:t>5</a:t>
+            </a:fld>
+            <a:endParaRPr lang="en-US"/>
+          </a:p>
+        </p:txBody>
+      </p:sp>
+    </p:spTree>
+  </p:cSld>
+  <p:clrMapOvr>
+    <a:masterClrMapping/>
+  </p:clrMapOvr>
+</p:sld>
+</file>
+
+<file path=ppt/slides/slide50.xml><?xml version="1.0" encoding="utf-8"?>
+<p:sld xmlns:a="http://schemas.openxmlformats.org/drawingml/2006/main" xmlns:r="http://schemas.openxmlformats.org/officeDocument/2006/relationships" xmlns:p="http://schemas.openxmlformats.org/presentationml/2006/main">
+  <p:cSld name="Slide 50">
+    <p:spTree>
+      <p:nvGrpSpPr>
+        <p:cNvPr id="1" name=""/>
+        <p:cNvGrpSpPr/>
+        <p:nvPr/>
+      </p:nvGrpSpPr>
+      <p:grpSpPr>
+        <a:xfrm>
+          <a:off x="0" y="0"/>
+          <a:ext cx="0" cy="0"/>
+          <a:chOff x="0" y="0"/>
+          <a:chExt cx="0" cy="0"/>
+        </a:xfrm>
+      </p:grpSpPr>
+      <p:sp>
+        <p:nvSpPr>
+          <p:cNvPr id="2" name="Text 0"/>
+          <p:cNvSpPr/>
+          <p:nvPr/>
+        </p:nvSpPr>
+        <p:spPr>
+          <a:xfrm>
+            <a:off x="457200" y="713232"/>
+            <a:ext cx="11368735" cy="274320"/>
+          </a:xfrm>
+          <a:prstGeom prst="rect">
+            <a:avLst/>
+          </a:prstGeom>
+          <a:noFill/>
+          <a:ln/>
+        </p:spPr>
+        <p:txBody>
+          <a:bodyPr wrap="square" lIns="0" tIns="0" rIns="0" bIns="0" rtlCol="0" anchor="ctr"/>
+          <a:lstStyle/>
+          <a:p>
+            <a:pPr algn="r" indent="0" marL="0">
+              <a:buNone/>
+            </a:pPr>
+            <a:r>
+              <a:rPr lang="en-US" sz="1400" b="1" dirty="0">
+                <a:solidFill>
+                  <a:srgbClr val="1C3F6E"/>
+                </a:solidFill>
+                <a:latin typeface="Calibri" pitchFamily="34" charset="0"/>
+                <a:ea typeface="Calibri" pitchFamily="34" charset="-122"/>
+                <a:cs typeface="Calibri" pitchFamily="34" charset="-120"/>
+              </a:rPr>
               <a:t>LOGBOOK</a:t>
             </a:r>
             <a:endParaRPr lang="en-US" sz="1400" dirty="0"/>
@@ -17481,7 +18925,7 @@
       </p:sp>
       <p:graphicFrame>
         <p:nvGraphicFramePr>
-          <p:cNvPr id="48" name="Table 0"/>
+          <p:cNvPr id="51" name="Table 0"/>
           <p:cNvGraphicFramePr>
             <a:graphicFrameLocks noGrp="1"/>
           </p:cNvGraphicFramePr>
@@ -18103,7 +19547,7 @@
             <a:pPr algn="ctr"/>
             <a:fld id="{F7021451-1387-4CA6-816F-3879F97B5CBC}" type="slidenum">
               <a:rPr b="1" lang="en-US"/>
-              <a:t>47</a:t>
+              <a:t>50</a:t>
             </a:fld>
             <a:endParaRPr lang="en-US"/>
           </a:p>
@@ -18117,9 +19561,9 @@
 </p:sld>
 </file>
 
-<file path=ppt/slides/slide48.xml><?xml version="1.0" encoding="utf-8"?>
+<file path=ppt/slides/slide51.xml><?xml version="1.0" encoding="utf-8"?>
 <p:sld xmlns:a="http://schemas.openxmlformats.org/drawingml/2006/main" xmlns:r="http://schemas.openxmlformats.org/officeDocument/2006/relationships" xmlns:p="http://schemas.openxmlformats.org/presentationml/2006/main">
-  <p:cSld name="Slide 48">
+  <p:cSld name="Slide 51">
     <p:spTree>
       <p:nvGrpSpPr>
         <p:cNvPr id="1" name=""/>
@@ -18214,7 +19658,7 @@
       </p:sp>
       <p:graphicFrame>
         <p:nvGraphicFramePr>
-          <p:cNvPr id="49" name="Table 0"/>
+          <p:cNvPr id="52" name="Table 0"/>
           <p:cNvGraphicFramePr>
             <a:graphicFrameLocks noGrp="1"/>
           </p:cNvGraphicFramePr>
@@ -18324,7 +19768,7 @@
                           <a:ea typeface="Calibri" pitchFamily="34" charset="-122"/>
                           <a:cs typeface="Calibri" pitchFamily="34" charset="-120"/>
                         </a:rPr>
-                        <a:t>Distribution and Methods; Importance and Problems; Recent Efforts to Conserve the Resource.</a:t>
+                        <a:t>Distribution and Methods; Importance; Problems; Recent Efforts to Conserve the Resource.</a:t>
                       </a:r>
                       <a:endParaRPr lang="en-US" sz="1600" dirty="0">
                         <a:latin typeface="Calibri" charset="0"/>
@@ -18974,7 +20418,7 @@
             <a:pPr algn="ctr"/>
             <a:fld id="{F7021451-1387-4CA6-816F-3879F97B5CBC}" type="slidenum">
               <a:rPr b="1" lang="en-US"/>
-              <a:t>48</a:t>
+              <a:t>51</a:t>
             </a:fld>
             <a:endParaRPr lang="en-US"/>
           </a:p>
@@ -18988,9 +20432,9 @@
 </p:sld>
 </file>
 
-<file path=ppt/slides/slide49.xml><?xml version="1.0" encoding="utf-8"?>
+<file path=ppt/slides/slide52.xml><?xml version="1.0" encoding="utf-8"?>
 <p:sld xmlns:a="http://schemas.openxmlformats.org/drawingml/2006/main" xmlns:r="http://schemas.openxmlformats.org/officeDocument/2006/relationships" xmlns:p="http://schemas.openxmlformats.org/presentationml/2006/main">
-  <p:cSld name="Slide 49">
+  <p:cSld name="Slide 52">
     <p:spTree>
       <p:nvGrpSpPr>
         <p:cNvPr id="1" name=""/>
@@ -19299,7 +20743,7 @@
             <a:pPr algn="ctr"/>
             <a:fld id="{F7021451-1387-4CA6-816F-3879F97B5CBC}" type="slidenum">
               <a:rPr b="1" lang="en-US"/>
-              <a:t>49</a:t>
+              <a:t>52</a:t>
             </a:fld>
             <a:endParaRPr lang="en-US"/>
           </a:p>
@@ -19313,9 +20757,9 @@
 </p:sld>
 </file>
 
-<file path=ppt/slides/slide5.xml><?xml version="1.0" encoding="utf-8"?>
+<file path=ppt/slides/slide53.xml><?xml version="1.0" encoding="utf-8"?>
 <p:sld xmlns:a="http://schemas.openxmlformats.org/drawingml/2006/main" xmlns:r="http://schemas.openxmlformats.org/officeDocument/2006/relationships" xmlns:p="http://schemas.openxmlformats.org/presentationml/2006/main">
-  <p:cSld name="Slide 5">
+  <p:cSld name="Slide 53">
     <p:spTree>
       <p:nvGrpSpPr>
         <p:cNvPr id="1" name=""/>
@@ -19363,7 +20807,7 @@
                 <a:ea typeface="Calibri" pitchFamily="34" charset="-122"/>
                 <a:cs typeface="Calibri" pitchFamily="34" charset="-120"/>
               </a:rPr>
-              <a:t>HOMEWORK CORRECTION</a:t>
+              <a:t>REFERENCES</a:t>
             </a:r>
             <a:endParaRPr lang="en-US" sz="1400" dirty="0"/>
           </a:p>
@@ -19386,7 +20830,7 @@
         <p:spPr>
           <a:xfrm>
             <a:off x="0" y="658368"/>
-            <a:ext cx="5120640" cy="5833872"/>
+            <a:ext cx="1463040" cy="5833872"/>
           </a:xfrm>
           <a:prstGeom prst="rect">
             <a:avLst/>
@@ -19401,8 +20845,8 @@
         </p:nvSpPr>
         <p:spPr>
           <a:xfrm>
-            <a:off x="5349240" y="1005840"/>
-            <a:ext cx="6522415" cy="731520"/>
+            <a:off x="1691640" y="1005840"/>
+            <a:ext cx="10180015" cy="731520"/>
           </a:xfrm>
           <a:prstGeom prst="rect">
             <a:avLst/>
@@ -19428,7 +20872,7 @@
                 <a:ea typeface="Times New Roman" pitchFamily="34" charset="-122"/>
                 <a:cs typeface="Times New Roman" pitchFamily="34" charset="-120"/>
               </a:rPr>
-              <a:t>Correction: Possible Answer</a:t>
+              <a:t>References</a:t>
             </a:r>
             <a:endParaRPr lang="en-US" sz="3600" dirty="0"/>
           </a:p>
@@ -19442,8 +20886,8 @@
         </p:nvSpPr>
         <p:spPr>
           <a:xfrm>
-            <a:off x="5349240" y="1783080"/>
-            <a:ext cx="6522415" cy="4663440"/>
+            <a:off x="1691640" y="1783080"/>
+            <a:ext cx="10180015" cy="4663440"/>
           </a:xfrm>
           <a:prstGeom prst="rect">
             <a:avLst/>
@@ -19455,24 +20899,151 @@
           <a:bodyPr wrap="square" lIns="0" tIns="0" rIns="0" bIns="0" rtlCol="0" anchor="t"/>
           <a:lstStyle/>
           <a:p>
-            <a:pPr algn="l" indent="0" marL="0">
+            <a:pPr algn="l" marL="342900" indent="-342900">
               <a:spcAft>
                 <a:spcPts val="800"/>
               </a:spcAft>
-              <a:buNone/>
+              <a:buSzPct val="100000"/>
+              <a:buChar char="•"/>
             </a:pPr>
             <a:r>
-              <a:rPr lang="en-US" sz="4000" dirty="0">
+              <a:rPr lang="en-US" sz="1800" dirty="0">
                 <a:solidFill>
                   <a:srgbClr val="111111"/>
                 </a:solidFill>
-                <a:latin typeface="Times New Roman" pitchFamily="34" charset="0"/>
-                <a:ea typeface="Times New Roman" pitchFamily="34" charset="-122"/>
-                <a:cs typeface="Times New Roman" pitchFamily="34" charset="-120"/>
+                <a:latin typeface="Calibri" pitchFamily="34" charset="0"/>
+                <a:ea typeface="Calibri" pitchFamily="34" charset="-122"/>
+                <a:cs typeface="Calibri" pitchFamily="34" charset="-120"/>
               </a:rPr>
-              <a:t>The Lagdo lake, the River Benue and the coast of Kribi and Limbe (also Lake Chad, the Wouri estuary).</a:t>
-            </a:r>
-            <a:endParaRPr lang="en-US" sz="4000" dirty="0"/>
+              <a:t>Geography Syllabus, Forms I–V, MINESEC (2023) — Form 4, Module II: Development and the Management of Primary Resources.</a:t>
+            </a:r>
+            <a:endParaRPr lang="en-US" sz="1800" dirty="0"/>
+          </a:p>
+          <a:p>
+            <a:pPr algn="l" marL="342900" indent="-342900">
+              <a:spcAft>
+                <a:spcPts val="800"/>
+              </a:spcAft>
+              <a:buSzPct val="100000"/>
+              <a:buChar char="•"/>
+            </a:pPr>
+            <a:r>
+              <a:rPr lang="en-US" sz="1800" dirty="0">
+                <a:solidFill>
+                  <a:srgbClr val="111111"/>
+                </a:solidFill>
+                <a:latin typeface="Calibri" pitchFamily="34" charset="0"/>
+                <a:ea typeface="Calibri" pitchFamily="34" charset="-122"/>
+                <a:cs typeface="Calibri" pitchFamily="34" charset="-120"/>
+              </a:rPr>
+              <a:t>Photo, Activity 1: “South Holston Lake, (Virginia-Tennessee border, USA)” by James St. John, CC BY 2.0, via Flickr (https://www.flickr.com/photos/47445767@N05/39221734762)</a:t>
+            </a:r>
+            <a:endParaRPr lang="en-US" sz="1800" dirty="0"/>
+          </a:p>
+          <a:p>
+            <a:pPr algn="l" marL="342900" indent="-342900">
+              <a:spcAft>
+                <a:spcPts val="800"/>
+              </a:spcAft>
+              <a:buSzPct val="100000"/>
+              <a:buChar char="•"/>
+            </a:pPr>
+            <a:r>
+              <a:rPr lang="en-US" sz="1800" dirty="0">
+                <a:solidFill>
+                  <a:srgbClr val="111111"/>
+                </a:solidFill>
+                <a:latin typeface="Calibri" pitchFamily="34" charset="0"/>
+                <a:ea typeface="Calibri" pitchFamily="34" charset="-122"/>
+                <a:cs typeface="Calibri" pitchFamily="34" charset="-120"/>
+              </a:rPr>
+              <a:t>Photo, Activity 2: “Fishermen, Lake Tana” by A.Davey, CC BY 2.0, via Flickr (https://www.flickr.com/photos/40595948@N00/2260748777)</a:t>
+            </a:r>
+            <a:endParaRPr lang="en-US" sz="1800" dirty="0"/>
+          </a:p>
+          <a:p>
+            <a:pPr algn="l" marL="342900" indent="-342900">
+              <a:spcAft>
+                <a:spcPts val="800"/>
+              </a:spcAft>
+              <a:buSzPct val="100000"/>
+              <a:buChar char="•"/>
+            </a:pPr>
+            <a:r>
+              <a:rPr lang="en-US" sz="1800" dirty="0">
+                <a:solidFill>
+                  <a:srgbClr val="111111"/>
+                </a:solidFill>
+                <a:latin typeface="Calibri" pitchFamily="34" charset="0"/>
+                <a:ea typeface="Calibri" pitchFamily="34" charset="-122"/>
+                <a:cs typeface="Calibri" pitchFamily="34" charset="-120"/>
+              </a:rPr>
+              <a:t>Photo, Activity 3: “The Amerigo Vespucci Arrives In Dublin (Tall Ships Race Dublin - 2012)” by infomatique, CC BY-SA 2.0, via Flickr (https://www.flickr.com/photos/80824546@N00/7846937046)</a:t>
+            </a:r>
+            <a:endParaRPr lang="en-US" sz="1800" dirty="0"/>
+          </a:p>
+          <a:p>
+            <a:pPr algn="l" marL="342900" indent="-342900">
+              <a:spcAft>
+                <a:spcPts val="800"/>
+              </a:spcAft>
+              <a:buSzPct val="100000"/>
+              <a:buChar char="•"/>
+            </a:pPr>
+            <a:r>
+              <a:rPr lang="en-US" sz="1800" dirty="0">
+                <a:solidFill>
+                  <a:srgbClr val="111111"/>
+                </a:solidFill>
+                <a:latin typeface="Calibri" pitchFamily="34" charset="0"/>
+                <a:ea typeface="Calibri" pitchFamily="34" charset="-122"/>
+                <a:cs typeface="Calibri" pitchFamily="34" charset="-120"/>
+              </a:rPr>
+              <a:t>Photo, Activity 4: “Kenyan food, farming and landscapes” by CGIAR Climate, CC BY-NC-SA 2.0, via Flickr (https://www.flickr.com/photos/55227776@N04/14310899853)</a:t>
+            </a:r>
+            <a:endParaRPr lang="en-US" sz="1800" dirty="0"/>
+          </a:p>
+          <a:p>
+            <a:pPr algn="l" marL="342900" indent="-342900">
+              <a:spcAft>
+                <a:spcPts val="800"/>
+              </a:spcAft>
+              <a:buSzPct val="100000"/>
+              <a:buChar char="•"/>
+            </a:pPr>
+            <a:r>
+              <a:rPr lang="en-US" sz="1800" dirty="0">
+                <a:solidFill>
+                  <a:srgbClr val="111111"/>
+                </a:solidFill>
+                <a:latin typeface="Calibri" pitchFamily="34" charset="0"/>
+                <a:ea typeface="Calibri" pitchFamily="34" charset="-122"/>
+                <a:cs typeface="Calibri" pitchFamily="34" charset="-120"/>
+              </a:rPr>
+              <a:t>Photo, Activity 5: “Gooderstone Water Gardens - pond - water lilies” by ell brown, CC BY 2.0, via Flickr (https://www.flickr.com/photos/39415781@N06/5993988041)</a:t>
+            </a:r>
+            <a:endParaRPr lang="en-US" sz="1800" dirty="0"/>
+          </a:p>
+          <a:p>
+            <a:pPr algn="l" marL="342900" indent="-342900">
+              <a:spcAft>
+                <a:spcPts val="800"/>
+              </a:spcAft>
+              <a:buSzPct val="100000"/>
+              <a:buChar char="•"/>
+            </a:pPr>
+            <a:r>
+              <a:rPr lang="en-US" sz="1800" dirty="0">
+                <a:solidFill>
+                  <a:srgbClr val="111111"/>
+                </a:solidFill>
+                <a:latin typeface="Calibri" pitchFamily="34" charset="0"/>
+                <a:ea typeface="Calibri" pitchFamily="34" charset="-122"/>
+                <a:cs typeface="Calibri" pitchFamily="34" charset="-120"/>
+              </a:rPr>
+              <a:t>Diagrams and animations: drawn for this lesson (Geography Department).</a:t>
+            </a:r>
+            <a:endParaRPr lang="en-US" sz="1800" dirty="0"/>
           </a:p>
         </p:txBody>
       </p:sp>
@@ -19518,353 +21089,7 @@
             <a:pPr algn="ctr"/>
             <a:fld id="{F7021451-1387-4CA6-816F-3879F97B5CBC}" type="slidenum">
               <a:rPr b="1" lang="en-US"/>
-              <a:t>5</a:t>
-            </a:fld>
-            <a:endParaRPr lang="en-US"/>
-          </a:p>
-        </p:txBody>
-      </p:sp>
-    </p:spTree>
-  </p:cSld>
-  <p:clrMapOvr>
-    <a:masterClrMapping/>
-  </p:clrMapOvr>
-</p:sld>
-</file>
-
-<file path=ppt/slides/slide50.xml><?xml version="1.0" encoding="utf-8"?>
-<p:sld xmlns:a="http://schemas.openxmlformats.org/drawingml/2006/main" xmlns:r="http://schemas.openxmlformats.org/officeDocument/2006/relationships" xmlns:p="http://schemas.openxmlformats.org/presentationml/2006/main">
-  <p:cSld name="Slide 50">
-    <p:spTree>
-      <p:nvGrpSpPr>
-        <p:cNvPr id="1" name=""/>
-        <p:cNvGrpSpPr/>
-        <p:nvPr/>
-      </p:nvGrpSpPr>
-      <p:grpSpPr>
-        <a:xfrm>
-          <a:off x="0" y="0"/>
-          <a:ext cx="0" cy="0"/>
-          <a:chOff x="0" y="0"/>
-          <a:chExt cx="0" cy="0"/>
-        </a:xfrm>
-      </p:grpSpPr>
-      <p:sp>
-        <p:nvSpPr>
-          <p:cNvPr id="2" name="Text 0"/>
-          <p:cNvSpPr/>
-          <p:nvPr/>
-        </p:nvSpPr>
-        <p:spPr>
-          <a:xfrm>
-            <a:off x="457200" y="713232"/>
-            <a:ext cx="11368735" cy="274320"/>
-          </a:xfrm>
-          <a:prstGeom prst="rect">
-            <a:avLst/>
-          </a:prstGeom>
-          <a:noFill/>
-          <a:ln/>
-        </p:spPr>
-        <p:txBody>
-          <a:bodyPr wrap="square" lIns="0" tIns="0" rIns="0" bIns="0" rtlCol="0" anchor="ctr"/>
-          <a:lstStyle/>
-          <a:p>
-            <a:pPr algn="r" indent="0" marL="0">
-              <a:buNone/>
-            </a:pPr>
-            <a:r>
-              <a:rPr lang="en-US" sz="1400" b="1" dirty="0">
-                <a:solidFill>
-                  <a:srgbClr val="1C3F6E"/>
-                </a:solidFill>
-                <a:latin typeface="Calibri" pitchFamily="34" charset="0"/>
-                <a:ea typeface="Calibri" pitchFamily="34" charset="-122"/>
-                <a:cs typeface="Calibri" pitchFamily="34" charset="-120"/>
-              </a:rPr>
-              <a:t>REFERENCES</a:t>
-            </a:r>
-            <a:endParaRPr lang="en-US" sz="1400" dirty="0"/>
-          </a:p>
-        </p:txBody>
-      </p:sp>
-      <p:pic>
-        <p:nvPicPr>
-          <p:cNvPr id="3" name="Image 0" descr="/home/claude/f4/img/minesec_sheet.png">    </p:cNvPr>
-          <p:cNvPicPr>
-            <a:picLocks noChangeAspect="1"/>
-          </p:cNvPicPr>
-          <p:nvPr/>
-        </p:nvPicPr>
-        <p:blipFill>
-          <a:blip r:embed="rId1"/>
-          <a:stretch>
-            <a:fillRect/>
-          </a:stretch>
-        </p:blipFill>
-        <p:spPr>
-          <a:xfrm>
-            <a:off x="0" y="658368"/>
-            <a:ext cx="1463040" cy="5833872"/>
-          </a:xfrm>
-          <a:prstGeom prst="rect">
-            <a:avLst/>
-          </a:prstGeom>
-        </p:spPr>
-      </p:pic>
-      <p:sp>
-        <p:nvSpPr>
-          <p:cNvPr id="4" name="Text 1"/>
-          <p:cNvSpPr/>
-          <p:nvPr/>
-        </p:nvSpPr>
-        <p:spPr>
-          <a:xfrm>
-            <a:off x="1691640" y="1005840"/>
-            <a:ext cx="10180015" cy="731520"/>
-          </a:xfrm>
-          <a:prstGeom prst="rect">
-            <a:avLst/>
-          </a:prstGeom>
-          <a:noFill/>
-          <a:ln/>
-        </p:spPr>
-        <p:txBody>
-          <a:bodyPr wrap="square" lIns="0" tIns="0" rIns="0" bIns="0" rtlCol="0" anchor="ctr">
-            <a:normAutofit/>
-          </a:bodyPr>
-          <a:lstStyle/>
-          <a:p>
-            <a:pPr algn="ctr" indent="0" marL="0">
-              <a:buNone/>
-            </a:pPr>
-            <a:r>
-              <a:rPr lang="en-US" sz="3600" b="1" dirty="0">
-                <a:solidFill>
-                  <a:srgbClr val="990011"/>
-                </a:solidFill>
-                <a:latin typeface="Times New Roman" pitchFamily="34" charset="0"/>
-                <a:ea typeface="Times New Roman" pitchFamily="34" charset="-122"/>
-                <a:cs typeface="Times New Roman" pitchFamily="34" charset="-120"/>
-              </a:rPr>
-              <a:t>References</a:t>
-            </a:r>
-            <a:endParaRPr lang="en-US" sz="3600" dirty="0"/>
-          </a:p>
-        </p:txBody>
-      </p:sp>
-      <p:sp>
-        <p:nvSpPr>
-          <p:cNvPr id="5" name="Text 2"/>
-          <p:cNvSpPr/>
-          <p:nvPr/>
-        </p:nvSpPr>
-        <p:spPr>
-          <a:xfrm>
-            <a:off x="1691640" y="1783080"/>
-            <a:ext cx="10180015" cy="4663440"/>
-          </a:xfrm>
-          <a:prstGeom prst="rect">
-            <a:avLst/>
-          </a:prstGeom>
-          <a:noFill/>
-          <a:ln/>
-        </p:spPr>
-        <p:txBody>
-          <a:bodyPr wrap="square" lIns="0" tIns="0" rIns="0" bIns="0" rtlCol="0" anchor="t"/>
-          <a:lstStyle/>
-          <a:p>
-            <a:pPr algn="l" marL="342900" indent="-342900">
-              <a:spcAft>
-                <a:spcPts val="800"/>
-              </a:spcAft>
-              <a:buSzPct val="100000"/>
-              <a:buChar char="•"/>
-            </a:pPr>
-            <a:r>
-              <a:rPr lang="en-US" sz="1800" dirty="0">
-                <a:solidFill>
-                  <a:srgbClr val="111111"/>
-                </a:solidFill>
-                <a:latin typeface="Calibri" pitchFamily="34" charset="0"/>
-                <a:ea typeface="Calibri" pitchFamily="34" charset="-122"/>
-                <a:cs typeface="Calibri" pitchFamily="34" charset="-120"/>
-              </a:rPr>
-              <a:t>Geography Syllabus, Forms I–V, MINESEC (2023) — Form 4, Module II: Development and the Management of Primary Resources.</a:t>
-            </a:r>
-            <a:endParaRPr lang="en-US" sz="1800" dirty="0"/>
-          </a:p>
-          <a:p>
-            <a:pPr algn="l" marL="342900" indent="-342900">
-              <a:spcAft>
-                <a:spcPts val="800"/>
-              </a:spcAft>
-              <a:buSzPct val="100000"/>
-              <a:buChar char="•"/>
-            </a:pPr>
-            <a:r>
-              <a:rPr lang="en-US" sz="1800" dirty="0">
-                <a:solidFill>
-                  <a:srgbClr val="111111"/>
-                </a:solidFill>
-                <a:latin typeface="Calibri" pitchFamily="34" charset="0"/>
-                <a:ea typeface="Calibri" pitchFamily="34" charset="-122"/>
-                <a:cs typeface="Calibri" pitchFamily="34" charset="-120"/>
-              </a:rPr>
-              <a:t>Photo, Activity 1: “South Holston Lake, (Virginia-Tennessee border, USA)” by James St. John, CC BY 2.0, via Flickr (https://www.flickr.com/photos/47445767@N05/39221734762)</a:t>
-            </a:r>
-            <a:endParaRPr lang="en-US" sz="1800" dirty="0"/>
-          </a:p>
-          <a:p>
-            <a:pPr algn="l" marL="342900" indent="-342900">
-              <a:spcAft>
-                <a:spcPts val="800"/>
-              </a:spcAft>
-              <a:buSzPct val="100000"/>
-              <a:buChar char="•"/>
-            </a:pPr>
-            <a:r>
-              <a:rPr lang="en-US" sz="1800" dirty="0">
-                <a:solidFill>
-                  <a:srgbClr val="111111"/>
-                </a:solidFill>
-                <a:latin typeface="Calibri" pitchFamily="34" charset="0"/>
-                <a:ea typeface="Calibri" pitchFamily="34" charset="-122"/>
-                <a:cs typeface="Calibri" pitchFamily="34" charset="-120"/>
-              </a:rPr>
-              <a:t>Photo, Activity 2: “Fishermen, Lake Tana” by A.Davey, CC BY 2.0, via Flickr (https://www.flickr.com/photos/40595948@N00/2260748777)</a:t>
-            </a:r>
-            <a:endParaRPr lang="en-US" sz="1800" dirty="0"/>
-          </a:p>
-          <a:p>
-            <a:pPr algn="l" marL="342900" indent="-342900">
-              <a:spcAft>
-                <a:spcPts val="800"/>
-              </a:spcAft>
-              <a:buSzPct val="100000"/>
-              <a:buChar char="•"/>
-            </a:pPr>
-            <a:r>
-              <a:rPr lang="en-US" sz="1800" dirty="0">
-                <a:solidFill>
-                  <a:srgbClr val="111111"/>
-                </a:solidFill>
-                <a:latin typeface="Calibri" pitchFamily="34" charset="0"/>
-                <a:ea typeface="Calibri" pitchFamily="34" charset="-122"/>
-                <a:cs typeface="Calibri" pitchFamily="34" charset="-120"/>
-              </a:rPr>
-              <a:t>Photo, Activity 3: “The Amerigo Vespucci Arrives In Dublin (Tall Ships Race Dublin - 2012)” by infomatique, CC BY-SA 2.0, via Flickr (https://www.flickr.com/photos/80824546@N00/7846937046)</a:t>
-            </a:r>
-            <a:endParaRPr lang="en-US" sz="1800" dirty="0"/>
-          </a:p>
-          <a:p>
-            <a:pPr algn="l" marL="342900" indent="-342900">
-              <a:spcAft>
-                <a:spcPts val="800"/>
-              </a:spcAft>
-              <a:buSzPct val="100000"/>
-              <a:buChar char="•"/>
-            </a:pPr>
-            <a:r>
-              <a:rPr lang="en-US" sz="1800" dirty="0">
-                <a:solidFill>
-                  <a:srgbClr val="111111"/>
-                </a:solidFill>
-                <a:latin typeface="Calibri" pitchFamily="34" charset="0"/>
-                <a:ea typeface="Calibri" pitchFamily="34" charset="-122"/>
-                <a:cs typeface="Calibri" pitchFamily="34" charset="-120"/>
-              </a:rPr>
-              <a:t>Photo, Activity 4: “Kenyan food, farming and landscapes” by CGIAR Climate, CC BY-NC-SA 2.0, via Flickr (https://www.flickr.com/photos/55227776@N04/14310899853)</a:t>
-            </a:r>
-            <a:endParaRPr lang="en-US" sz="1800" dirty="0"/>
-          </a:p>
-          <a:p>
-            <a:pPr algn="l" marL="342900" indent="-342900">
-              <a:spcAft>
-                <a:spcPts val="800"/>
-              </a:spcAft>
-              <a:buSzPct val="100000"/>
-              <a:buChar char="•"/>
-            </a:pPr>
-            <a:r>
-              <a:rPr lang="en-US" sz="1800" dirty="0">
-                <a:solidFill>
-                  <a:srgbClr val="111111"/>
-                </a:solidFill>
-                <a:latin typeface="Calibri" pitchFamily="34" charset="0"/>
-                <a:ea typeface="Calibri" pitchFamily="34" charset="-122"/>
-                <a:cs typeface="Calibri" pitchFamily="34" charset="-120"/>
-              </a:rPr>
-              <a:t>Photo, Activity 5: “Gooderstone Water Gardens - pond - water lilies” by ell brown, CC BY 2.0, via Flickr (https://www.flickr.com/photos/39415781@N06/5993988041)</a:t>
-            </a:r>
-            <a:endParaRPr lang="en-US" sz="1800" dirty="0"/>
-          </a:p>
-          <a:p>
-            <a:pPr algn="l" marL="342900" indent="-342900">
-              <a:spcAft>
-                <a:spcPts val="800"/>
-              </a:spcAft>
-              <a:buSzPct val="100000"/>
-              <a:buChar char="•"/>
-            </a:pPr>
-            <a:r>
-              <a:rPr lang="en-US" sz="1800" dirty="0">
-                <a:solidFill>
-                  <a:srgbClr val="111111"/>
-                </a:solidFill>
-                <a:latin typeface="Calibri" pitchFamily="34" charset="0"/>
-                <a:ea typeface="Calibri" pitchFamily="34" charset="-122"/>
-                <a:cs typeface="Calibri" pitchFamily="34" charset="-120"/>
-              </a:rPr>
-              <a:t>Diagrams and animations: drawn for this lesson (Geography Department).</a:t>
-            </a:r>
-            <a:endParaRPr lang="en-US" sz="1800" dirty="0"/>
-          </a:p>
-        </p:txBody>
-      </p:sp>
-      <p:sp>
-        <p:nvSpPr>
-          <p:cNvPr id="25" name="Slide Number Placeholder 0"/>
-          <p:cNvSpPr>
-            <a:spLocks noGrp="1"/>
-          </p:cNvSpPr>
-          <p:nvPr>
-            <p:ph type="sldNum" sz="quarter" idx="4294967295"/>
-          </p:nvPr>
-        </p:nvSpPr>
-        <p:spPr>
-          <a:xfrm>
-            <a:off x="27432" y="91440"/>
-            <a:ext cx="585216" cy="475488"/>
-          </a:xfrm>
-          <a:prstGeom prst="rect">
-            <a:avLst/>
-          </a:prstGeom>
-          <a:extLst>
-            <a:ext uri="{C572A759-6A51-4108-AA02-DFA0A04FC94B}">
-              <ma14:wrappingTextBoxFlag xmlns:ma14="http://schemas.microsoft.com/office/mac/drawingml/2011/main" val="0"/>
-            </a:ext>
-          </a:extLst>
-        </p:spPr>
-        <p:txBody>
-          <a:bodyPr/>
-          <a:lstStyle>
-            <a:lvl1pPr>
-              <a:defRPr sz="2000">
-                <a:solidFill>
-                  <a:srgbClr val="FFFFFF"/>
-                </a:solidFill>
-                <a:latin typeface="Calibri"/>
-                <a:ea typeface="Calibri"/>
-                <a:cs typeface="Calibri"/>
-              </a:defRPr>
-            </a:lvl1pPr>
-          </a:lstStyle>
-          <a:p>
-            <a:pPr algn="ctr"/>
-            <a:fld id="{F7021451-1387-4CA6-816F-3879F97B5CBC}" type="slidenum">
-              <a:rPr b="1" lang="en-US"/>
-              <a:t>50</a:t>
+              <a:t>53</a:t>
             </a:fld>
             <a:endParaRPr lang="en-US"/>
           </a:p>
